--- a/vi/data-frameworks/03-singapore-open-government.pptx
+++ b/vi/data-frameworks/03-singapore-open-government.pptx
@@ -1,8 +1,8 @@
 
 <file path=ppt/presentation.xml><?xml version="1.0" encoding="utf-8"?>
-<p:presentation xmlns:a="http://schemas.openxmlformats.org/drawingml/2006/main" xmlns:p="http://schemas.openxmlformats.org/presentationml/2006/main" xmlns:r="http://schemas.openxmlformats.org/officeDocument/2006/relationships" autoCompressPictures="0" saveSubsetFonts="1">
+<p:presentation xmlns:a="http://schemas.openxmlformats.org/drawingml/2006/main" xmlns:p="http://schemas.openxmlformats.org/presentationml/2006/main" xmlns:r="http://schemas.openxmlformats.org/officeDocument/2006/relationships" saveSubsetFonts="1" showSpecialPlsOnTitleSld="0">
   <p:sldMasterIdLst>
-    <p:sldMasterId id="2147483648" r:id="rId1"/>
+    <p:sldMasterId id="2147483660" r:id="rId1"/>
   </p:sldMasterIdLst>
   <p:sldIdLst>
     <p:sldId id="256" r:id="rId2"/>
@@ -39,13 +39,13 @@
     <p:sldId id="287" r:id="rId33"/>
     <p:sldId id="288" r:id="rId34"/>
   </p:sldIdLst>
-  <p:sldSz cx="9144000" cy="5143500" type="screen16x9"/>
+  <p:sldSz cx="12192000" cy="6858000"/>
   <p:notesSz cx="6858000" cy="9144000"/>
   <p:defaultTextStyle>
     <a:defPPr>
-      <a:defRPr lang="en-US"/>
+      <a:defRPr lang="en-GB"/>
     </a:defPPr>
-    <a:lvl1pPr algn="l" defTabSz="457200" eaLnBrk="1" hangingPunct="1" latinLnBrk="0" marL="0" rtl="0">
+    <a:lvl1pPr algn="l" defTabSz="914400" eaLnBrk="1" hangingPunct="1" latinLnBrk="0" marL="0" rtl="0">
       <a:defRPr kern="1200" sz="1800">
         <a:solidFill>
           <a:schemeClr val="tx1"/>
@@ -55,7 +55,7 @@
         <a:cs typeface="+mn-cs"/>
       </a:defRPr>
     </a:lvl1pPr>
-    <a:lvl2pPr algn="l" defTabSz="457200" eaLnBrk="1" hangingPunct="1" latinLnBrk="0" marL="457200" rtl="0">
+    <a:lvl2pPr algn="l" defTabSz="914400" eaLnBrk="1" hangingPunct="1" latinLnBrk="0" marL="457200" rtl="0">
       <a:defRPr kern="1200" sz="1800">
         <a:solidFill>
           <a:schemeClr val="tx1"/>
@@ -65,7 +65,7 @@
         <a:cs typeface="+mn-cs"/>
       </a:defRPr>
     </a:lvl2pPr>
-    <a:lvl3pPr algn="l" defTabSz="457200" eaLnBrk="1" hangingPunct="1" latinLnBrk="0" marL="914400" rtl="0">
+    <a:lvl3pPr algn="l" defTabSz="914400" eaLnBrk="1" hangingPunct="1" latinLnBrk="0" marL="914400" rtl="0">
       <a:defRPr kern="1200" sz="1800">
         <a:solidFill>
           <a:schemeClr val="tx1"/>
@@ -75,7 +75,7 @@
         <a:cs typeface="+mn-cs"/>
       </a:defRPr>
     </a:lvl3pPr>
-    <a:lvl4pPr algn="l" defTabSz="457200" eaLnBrk="1" hangingPunct="1" latinLnBrk="0" marL="1371600" rtl="0">
+    <a:lvl4pPr algn="l" defTabSz="914400" eaLnBrk="1" hangingPunct="1" latinLnBrk="0" marL="1371600" rtl="0">
       <a:defRPr kern="1200" sz="1800">
         <a:solidFill>
           <a:schemeClr val="tx1"/>
@@ -85,7 +85,7 @@
         <a:cs typeface="+mn-cs"/>
       </a:defRPr>
     </a:lvl4pPr>
-    <a:lvl5pPr algn="l" defTabSz="457200" eaLnBrk="1" hangingPunct="1" latinLnBrk="0" marL="1828800" rtl="0">
+    <a:lvl5pPr algn="l" defTabSz="914400" eaLnBrk="1" hangingPunct="1" latinLnBrk="0" marL="1828800" rtl="0">
       <a:defRPr kern="1200" sz="1800">
         <a:solidFill>
           <a:schemeClr val="tx1"/>
@@ -95,7 +95,7 @@
         <a:cs typeface="+mn-cs"/>
       </a:defRPr>
     </a:lvl5pPr>
-    <a:lvl6pPr algn="l" defTabSz="457200" eaLnBrk="1" hangingPunct="1" latinLnBrk="0" marL="2286000" rtl="0">
+    <a:lvl6pPr algn="l" defTabSz="914400" eaLnBrk="1" hangingPunct="1" latinLnBrk="0" marL="2286000" rtl="0">
       <a:defRPr kern="1200" sz="1800">
         <a:solidFill>
           <a:schemeClr val="tx1"/>
@@ -105,7 +105,7 @@
         <a:cs typeface="+mn-cs"/>
       </a:defRPr>
     </a:lvl6pPr>
-    <a:lvl7pPr algn="l" defTabSz="457200" eaLnBrk="1" hangingPunct="1" latinLnBrk="0" marL="2743200" rtl="0">
+    <a:lvl7pPr algn="l" defTabSz="914400" eaLnBrk="1" hangingPunct="1" latinLnBrk="0" marL="2743200" rtl="0">
       <a:defRPr kern="1200" sz="1800">
         <a:solidFill>
           <a:schemeClr val="tx1"/>
@@ -115,7 +115,7 @@
         <a:cs typeface="+mn-cs"/>
       </a:defRPr>
     </a:lvl7pPr>
-    <a:lvl8pPr algn="l" defTabSz="457200" eaLnBrk="1" hangingPunct="1" latinLnBrk="0" marL="3200400" rtl="0">
+    <a:lvl8pPr algn="l" defTabSz="914400" eaLnBrk="1" hangingPunct="1" latinLnBrk="0" marL="3200400" rtl="0">
       <a:defRPr kern="1200" sz="1800">
         <a:solidFill>
           <a:schemeClr val="tx1"/>
@@ -125,7 +125,7 @@
         <a:cs typeface="+mn-cs"/>
       </a:defRPr>
     </a:lvl8pPr>
-    <a:lvl9pPr algn="l" defTabSz="457200" eaLnBrk="1" hangingPunct="1" latinLnBrk="0" marL="3657600" rtl="0">
+    <a:lvl9pPr algn="l" defTabSz="914400" eaLnBrk="1" hangingPunct="1" latinLnBrk="0" marL="3657600" rtl="0">
       <a:defRPr kern="1200" sz="1800">
         <a:solidFill>
           <a:schemeClr val="tx1"/>
@@ -138,18 +138,7 @@
   </p:defaultTextStyle>
   <p:extLst>
     <p:ext uri="{EFAFB233-063F-42B5-8137-9DF3F51BA10A}">
-      <p15:sldGuideLst xmlns:p15="http://schemas.microsoft.com/office/powerpoint/2012/main">
-        <p15:guide id="1" orient="horz" pos="1620" userDrawn="1">
-          <p15:clr>
-            <a:srgbClr val="A4A3A4"/>
-          </p15:clr>
-        </p15:guide>
-        <p15:guide id="2" pos="2880" userDrawn="1">
-          <p15:clr>
-            <a:srgbClr val="A4A3A4"/>
-          </p15:clr>
-        </p15:guide>
-      </p15:sldGuideLst>
+      <p15:sldGuideLst xmlns:p15="http://schemas.microsoft.com/office/powerpoint/2012/main"/>
     </p:ext>
   </p:extLst>
 </p:presentation>
@@ -184,18 +173,23 @@
         </p:nvSpPr>
         <p:spPr>
           <a:xfrm>
-            <a:off x="685800" y="1597819"/>
-            <a:ext cx="7772400" cy="1102519"/>
+            <a:off x="1524000" y="1122363"/>
+            <a:ext cx="9144000" cy="2387600"/>
           </a:xfrm>
         </p:spPr>
         <p:txBody>
-          <a:bodyPr/>
-          <a:lstStyle/>
-          <a:p>
-            <a:r>
-              <a:rPr lang="en-US"/>
+          <a:bodyPr anchor="b"/>
+          <a:lstStyle>
+            <a:lvl1pPr algn="ctr">
+              <a:defRPr sz="6000"/>
+            </a:lvl1pPr>
+          </a:lstStyle>
+          <a:p>
+            <a:r>
+              <a:rPr lang="en-GB"/>
               <a:t>Click to edit Master title style</a:t>
             </a:r>
+            <a:endParaRPr lang="en-GB" dirty="0"/>
           </a:p>
         </p:txBody>
       </p:sp>
@@ -211,8 +205,8 @@
         </p:nvSpPr>
         <p:spPr>
           <a:xfrm>
-            <a:off x="1371600" y="2914650"/>
-            <a:ext cx="6400800" cy="1314450"/>
+            <a:off x="1524000" y="3602038"/>
+            <a:ext cx="9144000" cy="1655762"/>
           </a:xfrm>
         </p:spPr>
         <p:txBody>
@@ -220,100 +214,47 @@
           <a:lstStyle>
             <a:lvl1pPr marL="0" indent="0" algn="ctr">
               <a:buNone/>
-              <a:defRPr>
-                <a:solidFill>
-                  <a:schemeClr val="tx1">
-                    <a:tint val="75000"/>
-                  </a:schemeClr>
-                </a:solidFill>
-              </a:defRPr>
+              <a:defRPr sz="2400"/>
             </a:lvl1pPr>
-            <a:lvl2pPr marL="342900" indent="0" algn="ctr">
-              <a:buNone/>
-              <a:defRPr>
-                <a:solidFill>
-                  <a:schemeClr val="tx1">
-                    <a:tint val="75000"/>
-                  </a:schemeClr>
-                </a:solidFill>
-              </a:defRPr>
+            <a:lvl2pPr marL="457200" indent="0" algn="ctr">
+              <a:buNone/>
+              <a:defRPr sz="2000"/>
             </a:lvl2pPr>
-            <a:lvl3pPr marL="685800" indent="0" algn="ctr">
-              <a:buNone/>
-              <a:defRPr>
-                <a:solidFill>
-                  <a:schemeClr val="tx1">
-                    <a:tint val="75000"/>
-                  </a:schemeClr>
-                </a:solidFill>
-              </a:defRPr>
+            <a:lvl3pPr marL="914400" indent="0" algn="ctr">
+              <a:buNone/>
+              <a:defRPr sz="1800"/>
             </a:lvl3pPr>
-            <a:lvl4pPr marL="1028700" indent="0" algn="ctr">
-              <a:buNone/>
-              <a:defRPr>
-                <a:solidFill>
-                  <a:schemeClr val="tx1">
-                    <a:tint val="75000"/>
-                  </a:schemeClr>
-                </a:solidFill>
-              </a:defRPr>
+            <a:lvl4pPr marL="1371600" indent="0" algn="ctr">
+              <a:buNone/>
+              <a:defRPr sz="1600"/>
             </a:lvl4pPr>
-            <a:lvl5pPr marL="1371600" indent="0" algn="ctr">
-              <a:buNone/>
-              <a:defRPr>
-                <a:solidFill>
-                  <a:schemeClr val="tx1">
-                    <a:tint val="75000"/>
-                  </a:schemeClr>
-                </a:solidFill>
-              </a:defRPr>
+            <a:lvl5pPr marL="1828800" indent="0" algn="ctr">
+              <a:buNone/>
+              <a:defRPr sz="1600"/>
             </a:lvl5pPr>
-            <a:lvl6pPr marL="1714500" indent="0" algn="ctr">
-              <a:buNone/>
-              <a:defRPr>
-                <a:solidFill>
-                  <a:schemeClr val="tx1">
-                    <a:tint val="75000"/>
-                  </a:schemeClr>
-                </a:solidFill>
-              </a:defRPr>
+            <a:lvl6pPr marL="2286000" indent="0" algn="ctr">
+              <a:buNone/>
+              <a:defRPr sz="1600"/>
             </a:lvl6pPr>
-            <a:lvl7pPr marL="2057400" indent="0" algn="ctr">
-              <a:buNone/>
-              <a:defRPr>
-                <a:solidFill>
-                  <a:schemeClr val="tx1">
-                    <a:tint val="75000"/>
-                  </a:schemeClr>
-                </a:solidFill>
-              </a:defRPr>
+            <a:lvl7pPr marL="2743200" indent="0" algn="ctr">
+              <a:buNone/>
+              <a:defRPr sz="1600"/>
             </a:lvl7pPr>
-            <a:lvl8pPr marL="2400300" indent="0" algn="ctr">
-              <a:buNone/>
-              <a:defRPr>
-                <a:solidFill>
-                  <a:schemeClr val="tx1">
-                    <a:tint val="75000"/>
-                  </a:schemeClr>
-                </a:solidFill>
-              </a:defRPr>
+            <a:lvl8pPr marL="3200400" indent="0" algn="ctr">
+              <a:buNone/>
+              <a:defRPr sz="1600"/>
             </a:lvl8pPr>
-            <a:lvl9pPr marL="2743200" indent="0" algn="ctr">
-              <a:buNone/>
-              <a:defRPr>
-                <a:solidFill>
-                  <a:schemeClr val="tx1">
-                    <a:tint val="75000"/>
-                  </a:schemeClr>
-                </a:solidFill>
-              </a:defRPr>
+            <a:lvl9pPr marL="3657600" indent="0" algn="ctr">
+              <a:buNone/>
+              <a:defRPr sz="1600"/>
             </a:lvl9pPr>
           </a:lstStyle>
           <a:p>
             <a:r>
-              <a:rPr lang="en-US"/>
+              <a:rPr lang="en-GB"/>
               <a:t>Click to edit Master subtitle style</a:t>
             </a:r>
+            <a:endParaRPr lang="en-GB" dirty="0"/>
           </a:p>
         </p:txBody>
       </p:sp>
@@ -332,11 +273,11 @@
           <a:bodyPr/>
           <a:lstStyle/>
           <a:p>
-            <a:fld id="{241EB5C9-1307-BA42-ABA2-0BC069CD8E7F}" type="datetimeFigureOut">
-              <a:rPr lang="en-US" smtClean="0"/>
-              <a:t>1/2/22</a:t>
+            <a:fld id="{846CE7D5-CF57-46EF-B807-FDD0502418D4}" type="datetimeFigureOut">
+              <a:rPr lang="en-GB" smtClean="0"/>
+              <a:t>13/01/2026</a:t>
             </a:fld>
-            <a:endParaRPr lang="en-US"/>
+            <a:endParaRPr lang="en-GB"/>
           </a:p>
         </p:txBody>
       </p:sp>
@@ -355,7 +296,10 @@
           <a:bodyPr/>
           <a:lstStyle/>
           <a:p>
-            <a:endParaRPr lang="en-US"/>
+            <a:r>
+              <a:rPr lang="en-GB"/>
+              <a:t>Tâm Anh Oxford Partnership</a:t>
+            </a:r>
           </a:p>
         </p:txBody>
       </p:sp>
@@ -374,24 +318,25 @@
           <a:bodyPr/>
           <a:lstStyle/>
           <a:p>
-            <a:fld id="{C5EF2332-01BF-834F-8236-50238282D533}" type="slidenum">
-              <a:rPr lang="en-US" smtClean="0"/>
+            <a:fld id="{330EA680-D336-4FF7-8B7A-9848BB0A1C32}" type="slidenum">
+              <a:rPr lang="en-GB" smtClean="0"/>
               <a:t>‹#›</a:t>
             </a:fld>
-            <a:endParaRPr lang="en-US"/>
+            <a:endParaRPr lang="en-GB"/>
           </a:p>
         </p:txBody>
       </p:sp>
     </p:spTree>
     <p:extLst>
       <p:ext uri="{BB962C8B-B14F-4D97-AF65-F5344CB8AC3E}">
-        <p14:creationId xmlns:p14="http://schemas.microsoft.com/office/powerpoint/2010/main" val="1444357513"/>
+        <p14:creationId xmlns:p14="http://schemas.microsoft.com/office/powerpoint/2010/main" val="2385387890"/>
       </p:ext>
     </p:extLst>
   </p:cSld>
   <p:clrMapOvr>
     <a:masterClrMapping/>
   </p:clrMapOvr>
+  <p:hf sldNum="0" hdr="0" ftr="0" dt="0"/>
 </p:sldLayout>
 </file>
 
@@ -428,9 +373,10 @@
           <a:lstStyle/>
           <a:p>
             <a:r>
-              <a:rPr lang="en-US"/>
+              <a:rPr lang="en-GB"/>
               <a:t>Click to edit Master title style</a:t>
             </a:r>
+            <a:endParaRPr lang="en-GB" dirty="0"/>
           </a:p>
         </p:txBody>
       </p:sp>
@@ -451,37 +397,38 @@
           <a:p>
             <a:pPr lvl="0"/>
             <a:r>
-              <a:rPr lang="en-US"/>
+              <a:rPr lang="en-GB"/>
               <a:t>Click to edit Master text styles</a:t>
             </a:r>
           </a:p>
           <a:p>
             <a:pPr lvl="1"/>
             <a:r>
-              <a:rPr lang="en-US"/>
+              <a:rPr lang="en-GB"/>
               <a:t>Second level</a:t>
             </a:r>
           </a:p>
           <a:p>
             <a:pPr lvl="2"/>
             <a:r>
-              <a:rPr lang="en-US"/>
+              <a:rPr lang="en-GB"/>
               <a:t>Third level</a:t>
             </a:r>
           </a:p>
           <a:p>
             <a:pPr lvl="3"/>
             <a:r>
-              <a:rPr lang="en-US"/>
+              <a:rPr lang="en-GB"/>
               <a:t>Fourth level</a:t>
             </a:r>
           </a:p>
           <a:p>
             <a:pPr lvl="4"/>
             <a:r>
-              <a:rPr lang="en-US"/>
+              <a:rPr lang="en-GB"/>
               <a:t>Fifth level</a:t>
             </a:r>
+            <a:endParaRPr lang="en-GB" dirty="0"/>
           </a:p>
         </p:txBody>
       </p:sp>
@@ -500,11 +447,11 @@
           <a:bodyPr/>
           <a:lstStyle/>
           <a:p>
-            <a:fld id="{241EB5C9-1307-BA42-ABA2-0BC069CD8E7F}" type="datetimeFigureOut">
-              <a:rPr lang="en-US" smtClean="0"/>
-              <a:t>1/2/22</a:t>
+            <a:fld id="{846CE7D5-CF57-46EF-B807-FDD0502418D4}" type="datetimeFigureOut">
+              <a:rPr lang="en-GB" smtClean="0"/>
+              <a:t>13/01/2026</a:t>
             </a:fld>
-            <a:endParaRPr lang="en-US"/>
+            <a:endParaRPr lang="en-GB"/>
           </a:p>
         </p:txBody>
       </p:sp>
@@ -523,7 +470,10 @@
           <a:bodyPr/>
           <a:lstStyle/>
           <a:p>
-            <a:endParaRPr lang="en-US"/>
+            <a:r>
+              <a:rPr lang="en-GB"/>
+              <a:t>Tâm Anh Oxford Partnership</a:t>
+            </a:r>
           </a:p>
         </p:txBody>
       </p:sp>
@@ -542,24 +492,25 @@
           <a:bodyPr/>
           <a:lstStyle/>
           <a:p>
-            <a:fld id="{C5EF2332-01BF-834F-8236-50238282D533}" type="slidenum">
-              <a:rPr lang="en-US" smtClean="0"/>
+            <a:fld id="{330EA680-D336-4FF7-8B7A-9848BB0A1C32}" type="slidenum">
+              <a:rPr lang="en-GB" smtClean="0"/>
               <a:t>‹#›</a:t>
             </a:fld>
-            <a:endParaRPr lang="en-US"/>
+            <a:endParaRPr lang="en-GB"/>
           </a:p>
         </p:txBody>
       </p:sp>
     </p:spTree>
     <p:extLst>
       <p:ext uri="{BB962C8B-B14F-4D97-AF65-F5344CB8AC3E}">
-        <p14:creationId xmlns:p14="http://schemas.microsoft.com/office/powerpoint/2010/main" val="313914798"/>
+        <p14:creationId xmlns:p14="http://schemas.microsoft.com/office/powerpoint/2010/main" val="2202905451"/>
       </p:ext>
     </p:extLst>
   </p:cSld>
   <p:clrMapOvr>
     <a:masterClrMapping/>
   </p:clrMapOvr>
+  <p:hf hdr="0" dt="0"/>
 </p:sldLayout>
 </file>
 
@@ -592,8 +543,8 @@
         </p:nvSpPr>
         <p:spPr>
           <a:xfrm>
-            <a:off x="6629400" y="205979"/>
-            <a:ext cx="2057400" cy="4388644"/>
+            <a:off x="8724900" y="365125"/>
+            <a:ext cx="2628900" cy="5811838"/>
           </a:xfrm>
         </p:spPr>
         <p:txBody>
@@ -601,9 +552,10 @@
           <a:lstStyle/>
           <a:p>
             <a:r>
-              <a:rPr lang="en-US"/>
+              <a:rPr lang="en-GB"/>
               <a:t>Click to edit Master title style</a:t>
             </a:r>
+            <a:endParaRPr lang="en-GB" dirty="0"/>
           </a:p>
         </p:txBody>
       </p:sp>
@@ -619,8 +571,8 @@
         </p:nvSpPr>
         <p:spPr>
           <a:xfrm>
-            <a:off x="457200" y="205979"/>
-            <a:ext cx="6019800" cy="4388644"/>
+            <a:off x="838200" y="365125"/>
+            <a:ext cx="7734300" cy="5811838"/>
           </a:xfrm>
         </p:spPr>
         <p:txBody>
@@ -629,37 +581,38 @@
           <a:p>
             <a:pPr lvl="0"/>
             <a:r>
-              <a:rPr lang="en-US"/>
+              <a:rPr lang="en-GB"/>
               <a:t>Click to edit Master text styles</a:t>
             </a:r>
           </a:p>
           <a:p>
             <a:pPr lvl="1"/>
             <a:r>
-              <a:rPr lang="en-US"/>
+              <a:rPr lang="en-GB"/>
               <a:t>Second level</a:t>
             </a:r>
           </a:p>
           <a:p>
             <a:pPr lvl="2"/>
             <a:r>
-              <a:rPr lang="en-US"/>
+              <a:rPr lang="en-GB"/>
               <a:t>Third level</a:t>
             </a:r>
           </a:p>
           <a:p>
             <a:pPr lvl="3"/>
             <a:r>
-              <a:rPr lang="en-US"/>
+              <a:rPr lang="en-GB"/>
               <a:t>Fourth level</a:t>
             </a:r>
           </a:p>
           <a:p>
             <a:pPr lvl="4"/>
             <a:r>
-              <a:rPr lang="en-US"/>
+              <a:rPr lang="en-GB"/>
               <a:t>Fifth level</a:t>
             </a:r>
+            <a:endParaRPr lang="en-GB" dirty="0"/>
           </a:p>
         </p:txBody>
       </p:sp>
@@ -678,11 +631,11 @@
           <a:bodyPr/>
           <a:lstStyle/>
           <a:p>
-            <a:fld id="{241EB5C9-1307-BA42-ABA2-0BC069CD8E7F}" type="datetimeFigureOut">
-              <a:rPr lang="en-US" smtClean="0"/>
-              <a:t>1/2/22</a:t>
+            <a:fld id="{846CE7D5-CF57-46EF-B807-FDD0502418D4}" type="datetimeFigureOut">
+              <a:rPr lang="en-GB" smtClean="0"/>
+              <a:t>13/01/2026</a:t>
             </a:fld>
-            <a:endParaRPr lang="en-US"/>
+            <a:endParaRPr lang="en-GB"/>
           </a:p>
         </p:txBody>
       </p:sp>
@@ -701,7 +654,10 @@
           <a:bodyPr/>
           <a:lstStyle/>
           <a:p>
-            <a:endParaRPr lang="en-US"/>
+            <a:r>
+              <a:rPr lang="en-GB"/>
+              <a:t>Tâm Anh Oxford Partnership</a:t>
+            </a:r>
           </a:p>
         </p:txBody>
       </p:sp>
@@ -720,24 +676,25 @@
           <a:bodyPr/>
           <a:lstStyle/>
           <a:p>
-            <a:fld id="{C5EF2332-01BF-834F-8236-50238282D533}" type="slidenum">
-              <a:rPr lang="en-US" smtClean="0"/>
+            <a:fld id="{330EA680-D336-4FF7-8B7A-9848BB0A1C32}" type="slidenum">
+              <a:rPr lang="en-GB" smtClean="0"/>
               <a:t>‹#›</a:t>
             </a:fld>
-            <a:endParaRPr lang="en-US"/>
+            <a:endParaRPr lang="en-GB"/>
           </a:p>
         </p:txBody>
       </p:sp>
     </p:spTree>
     <p:extLst>
       <p:ext uri="{BB962C8B-B14F-4D97-AF65-F5344CB8AC3E}">
-        <p14:creationId xmlns:p14="http://schemas.microsoft.com/office/powerpoint/2010/main" val="2581529045"/>
+        <p14:creationId xmlns:p14="http://schemas.microsoft.com/office/powerpoint/2010/main" val="3479445657"/>
       </p:ext>
     </p:extLst>
   </p:cSld>
   <p:clrMapOvr>
     <a:masterClrMapping/>
   </p:clrMapOvr>
+  <p:hf hdr="0" dt="0"/>
 </p:sldLayout>
 </file>
 
@@ -774,9 +731,10 @@
           <a:lstStyle/>
           <a:p>
             <a:r>
-              <a:rPr lang="en-US"/>
+              <a:rPr lang="en-GB"/>
               <a:t>Click to edit Master title style</a:t>
             </a:r>
+            <a:endParaRPr lang="en-GB" dirty="0"/>
           </a:p>
         </p:txBody>
       </p:sp>
@@ -797,37 +755,38 @@
           <a:p>
             <a:pPr lvl="0"/>
             <a:r>
-              <a:rPr lang="en-US"/>
+              <a:rPr lang="en-GB"/>
               <a:t>Click to edit Master text styles</a:t>
             </a:r>
           </a:p>
           <a:p>
             <a:pPr lvl="1"/>
             <a:r>
-              <a:rPr lang="en-US"/>
+              <a:rPr lang="en-GB"/>
               <a:t>Second level</a:t>
             </a:r>
           </a:p>
           <a:p>
             <a:pPr lvl="2"/>
             <a:r>
-              <a:rPr lang="en-US"/>
+              <a:rPr lang="en-GB"/>
               <a:t>Third level</a:t>
             </a:r>
           </a:p>
           <a:p>
             <a:pPr lvl="3"/>
             <a:r>
-              <a:rPr lang="en-US"/>
+              <a:rPr lang="en-GB"/>
               <a:t>Fourth level</a:t>
             </a:r>
           </a:p>
           <a:p>
             <a:pPr lvl="4"/>
             <a:r>
-              <a:rPr lang="en-US"/>
+              <a:rPr lang="en-GB"/>
               <a:t>Fifth level</a:t>
             </a:r>
+            <a:endParaRPr lang="en-GB" dirty="0"/>
           </a:p>
         </p:txBody>
       </p:sp>
@@ -846,11 +805,11 @@
           <a:bodyPr/>
           <a:lstStyle/>
           <a:p>
-            <a:fld id="{241EB5C9-1307-BA42-ABA2-0BC069CD8E7F}" type="datetimeFigureOut">
-              <a:rPr lang="en-US" smtClean="0"/>
-              <a:t>1/2/22</a:t>
+            <a:fld id="{846CE7D5-CF57-46EF-B807-FDD0502418D4}" type="datetimeFigureOut">
+              <a:rPr lang="en-GB" smtClean="0"/>
+              <a:t>13/01/2026</a:t>
             </a:fld>
-            <a:endParaRPr lang="en-US"/>
+            <a:endParaRPr lang="en-GB"/>
           </a:p>
         </p:txBody>
       </p:sp>
@@ -869,7 +828,10 @@
           <a:bodyPr/>
           <a:lstStyle/>
           <a:p>
-            <a:endParaRPr lang="en-US"/>
+            <a:r>
+              <a:rPr lang="en-GB"/>
+              <a:t>Tâm Anh Oxford Partnership</a:t>
+            </a:r>
           </a:p>
         </p:txBody>
       </p:sp>
@@ -888,24 +850,25 @@
           <a:bodyPr/>
           <a:lstStyle/>
           <a:p>
-            <a:fld id="{C5EF2332-01BF-834F-8236-50238282D533}" type="slidenum">
-              <a:rPr lang="en-US" smtClean="0"/>
+            <a:fld id="{330EA680-D336-4FF7-8B7A-9848BB0A1C32}" type="slidenum">
+              <a:rPr lang="en-GB" smtClean="0"/>
               <a:t>‹#›</a:t>
             </a:fld>
-            <a:endParaRPr lang="en-US"/>
+            <a:endParaRPr lang="en-GB"/>
           </a:p>
         </p:txBody>
       </p:sp>
     </p:spTree>
     <p:extLst>
       <p:ext uri="{BB962C8B-B14F-4D97-AF65-F5344CB8AC3E}">
-        <p14:creationId xmlns:p14="http://schemas.microsoft.com/office/powerpoint/2010/main" val="338346009"/>
+        <p14:creationId xmlns:p14="http://schemas.microsoft.com/office/powerpoint/2010/main" val="949138452"/>
       </p:ext>
     </p:extLst>
   </p:cSld>
   <p:clrMapOvr>
     <a:masterClrMapping/>
   </p:clrMapOvr>
+  <p:hf hdr="0" dt="0"/>
 </p:sldLayout>
 </file>
 
@@ -938,22 +901,23 @@
         </p:nvSpPr>
         <p:spPr>
           <a:xfrm>
-            <a:off x="722313" y="3305176"/>
-            <a:ext cx="7772400" cy="1021556"/>
+            <a:off x="831850" y="1709738"/>
+            <a:ext cx="10515600" cy="2852737"/>
           </a:xfrm>
         </p:spPr>
         <p:txBody>
-          <a:bodyPr anchor="t"/>
+          <a:bodyPr anchor="b"/>
           <a:lstStyle>
-            <a:lvl1pPr algn="l">
-              <a:defRPr sz="3000" b="1" cap="all"/>
+            <a:lvl1pPr>
+              <a:defRPr sz="6000"/>
             </a:lvl1pPr>
           </a:lstStyle>
           <a:p>
             <a:r>
-              <a:rPr lang="en-US"/>
+              <a:rPr lang="en-GB"/>
               <a:t>Click to edit Master title style</a:t>
             </a:r>
+            <a:endParaRPr lang="en-GB" dirty="0"/>
           </a:p>
         </p:txBody>
       </p:sp>
@@ -969,99 +933,99 @@
         </p:nvSpPr>
         <p:spPr>
           <a:xfrm>
-            <a:off x="722313" y="2180035"/>
-            <a:ext cx="7772400" cy="1125140"/>
+            <a:off x="831850" y="4589463"/>
+            <a:ext cx="10515600" cy="1500187"/>
           </a:xfrm>
         </p:spPr>
         <p:txBody>
-          <a:bodyPr anchor="b"/>
+          <a:bodyPr/>
           <a:lstStyle>
             <a:lvl1pPr marL="0" indent="0">
               <a:buNone/>
-              <a:defRPr sz="1500">
+              <a:defRPr sz="2400">
                 <a:solidFill>
                   <a:schemeClr val="tx1">
-                    <a:tint val="75000"/>
+                    <a:tint val="82000"/>
                   </a:schemeClr>
                 </a:solidFill>
               </a:defRPr>
             </a:lvl1pPr>
-            <a:lvl2pPr marL="342900" indent="0">
-              <a:buNone/>
-              <a:defRPr sz="1350">
+            <a:lvl2pPr marL="457200" indent="0">
+              <a:buNone/>
+              <a:defRPr sz="2000">
                 <a:solidFill>
                   <a:schemeClr val="tx1">
-                    <a:tint val="75000"/>
+                    <a:tint val="82000"/>
                   </a:schemeClr>
                 </a:solidFill>
               </a:defRPr>
             </a:lvl2pPr>
-            <a:lvl3pPr marL="685800" indent="0">
-              <a:buNone/>
-              <a:defRPr sz="1200">
+            <a:lvl3pPr marL="914400" indent="0">
+              <a:buNone/>
+              <a:defRPr sz="1800">
                 <a:solidFill>
                   <a:schemeClr val="tx1">
-                    <a:tint val="75000"/>
+                    <a:tint val="82000"/>
                   </a:schemeClr>
                 </a:solidFill>
               </a:defRPr>
             </a:lvl3pPr>
-            <a:lvl4pPr marL="1028700" indent="0">
-              <a:buNone/>
-              <a:defRPr sz="1050">
+            <a:lvl4pPr marL="1371600" indent="0">
+              <a:buNone/>
+              <a:defRPr sz="1600">
                 <a:solidFill>
                   <a:schemeClr val="tx1">
-                    <a:tint val="75000"/>
+                    <a:tint val="82000"/>
                   </a:schemeClr>
                 </a:solidFill>
               </a:defRPr>
             </a:lvl4pPr>
-            <a:lvl5pPr marL="1371600" indent="0">
-              <a:buNone/>
-              <a:defRPr sz="1050">
+            <a:lvl5pPr marL="1828800" indent="0">
+              <a:buNone/>
+              <a:defRPr sz="1600">
                 <a:solidFill>
                   <a:schemeClr val="tx1">
-                    <a:tint val="75000"/>
+                    <a:tint val="82000"/>
                   </a:schemeClr>
                 </a:solidFill>
               </a:defRPr>
             </a:lvl5pPr>
-            <a:lvl6pPr marL="1714500" indent="0">
-              <a:buNone/>
-              <a:defRPr sz="1050">
+            <a:lvl6pPr marL="2286000" indent="0">
+              <a:buNone/>
+              <a:defRPr sz="1600">
                 <a:solidFill>
                   <a:schemeClr val="tx1">
-                    <a:tint val="75000"/>
+                    <a:tint val="82000"/>
                   </a:schemeClr>
                 </a:solidFill>
               </a:defRPr>
             </a:lvl6pPr>
-            <a:lvl7pPr marL="2057400" indent="0">
-              <a:buNone/>
-              <a:defRPr sz="1050">
+            <a:lvl7pPr marL="2743200" indent="0">
+              <a:buNone/>
+              <a:defRPr sz="1600">
                 <a:solidFill>
                   <a:schemeClr val="tx1">
-                    <a:tint val="75000"/>
+                    <a:tint val="82000"/>
                   </a:schemeClr>
                 </a:solidFill>
               </a:defRPr>
             </a:lvl7pPr>
-            <a:lvl8pPr marL="2400300" indent="0">
-              <a:buNone/>
-              <a:defRPr sz="1050">
+            <a:lvl8pPr marL="3200400" indent="0">
+              <a:buNone/>
+              <a:defRPr sz="1600">
                 <a:solidFill>
                   <a:schemeClr val="tx1">
-                    <a:tint val="75000"/>
+                    <a:tint val="82000"/>
                   </a:schemeClr>
                 </a:solidFill>
               </a:defRPr>
             </a:lvl8pPr>
-            <a:lvl9pPr marL="2743200" indent="0">
-              <a:buNone/>
-              <a:defRPr sz="1050">
+            <a:lvl9pPr marL="3657600" indent="0">
+              <a:buNone/>
+              <a:defRPr sz="1600">
                 <a:solidFill>
                   <a:schemeClr val="tx1">
-                    <a:tint val="75000"/>
+                    <a:tint val="82000"/>
                   </a:schemeClr>
                 </a:solidFill>
               </a:defRPr>
@@ -1070,7 +1034,7 @@
           <a:p>
             <a:pPr lvl="0"/>
             <a:r>
-              <a:rPr lang="en-US"/>
+              <a:rPr lang="en-GB"/>
               <a:t>Click to edit Master text styles</a:t>
             </a:r>
           </a:p>
@@ -1091,11 +1055,11 @@
           <a:bodyPr/>
           <a:lstStyle/>
           <a:p>
-            <a:fld id="{241EB5C9-1307-BA42-ABA2-0BC069CD8E7F}" type="datetimeFigureOut">
-              <a:rPr lang="en-US" smtClean="0"/>
-              <a:t>1/2/22</a:t>
+            <a:fld id="{846CE7D5-CF57-46EF-B807-FDD0502418D4}" type="datetimeFigureOut">
+              <a:rPr lang="en-GB" smtClean="0"/>
+              <a:t>13/01/2026</a:t>
             </a:fld>
-            <a:endParaRPr lang="en-US"/>
+            <a:endParaRPr lang="en-GB"/>
           </a:p>
         </p:txBody>
       </p:sp>
@@ -1114,7 +1078,10 @@
           <a:bodyPr/>
           <a:lstStyle/>
           <a:p>
-            <a:endParaRPr lang="en-US"/>
+            <a:r>
+              <a:rPr lang="en-GB"/>
+              <a:t>Tâm Anh Oxford Partnership</a:t>
+            </a:r>
           </a:p>
         </p:txBody>
       </p:sp>
@@ -1133,24 +1100,25 @@
           <a:bodyPr/>
           <a:lstStyle/>
           <a:p>
-            <a:fld id="{C5EF2332-01BF-834F-8236-50238282D533}" type="slidenum">
-              <a:rPr lang="en-US" smtClean="0"/>
+            <a:fld id="{330EA680-D336-4FF7-8B7A-9848BB0A1C32}" type="slidenum">
+              <a:rPr lang="en-GB" smtClean="0"/>
               <a:t>‹#›</a:t>
             </a:fld>
-            <a:endParaRPr lang="en-US"/>
+            <a:endParaRPr lang="en-GB"/>
           </a:p>
         </p:txBody>
       </p:sp>
     </p:spTree>
     <p:extLst>
       <p:ext uri="{BB962C8B-B14F-4D97-AF65-F5344CB8AC3E}">
-        <p14:creationId xmlns:p14="http://schemas.microsoft.com/office/powerpoint/2010/main" val="1073069076"/>
+        <p14:creationId xmlns:p14="http://schemas.microsoft.com/office/powerpoint/2010/main" val="2591524520"/>
       </p:ext>
     </p:extLst>
   </p:cSld>
   <p:clrMapOvr>
     <a:masterClrMapping/>
   </p:clrMapOvr>
+  <p:hf hdr="0" dt="0"/>
 </p:sldLayout>
 </file>
 
@@ -1187,9 +1155,10 @@
           <a:lstStyle/>
           <a:p>
             <a:r>
-              <a:rPr lang="en-US"/>
+              <a:rPr lang="en-GB"/>
               <a:t>Click to edit Master title style</a:t>
             </a:r>
+            <a:endParaRPr lang="en-GB" dirty="0"/>
           </a:p>
         </p:txBody>
       </p:sp>
@@ -1205,75 +1174,48 @@
         </p:nvSpPr>
         <p:spPr>
           <a:xfrm>
-            <a:off x="457200" y="1200151"/>
-            <a:ext cx="4038600" cy="3394472"/>
+            <a:off x="838200" y="1825625"/>
+            <a:ext cx="5181600" cy="4351338"/>
           </a:xfrm>
         </p:spPr>
         <p:txBody>
           <a:bodyPr/>
-          <a:lstStyle>
-            <a:lvl1pPr>
-              <a:defRPr sz="2100"/>
-            </a:lvl1pPr>
-            <a:lvl2pPr>
-              <a:defRPr sz="1800"/>
-            </a:lvl2pPr>
-            <a:lvl3pPr>
-              <a:defRPr sz="1500"/>
-            </a:lvl3pPr>
-            <a:lvl4pPr>
-              <a:defRPr sz="1350"/>
-            </a:lvl4pPr>
-            <a:lvl5pPr>
-              <a:defRPr sz="1350"/>
-            </a:lvl5pPr>
-            <a:lvl6pPr>
-              <a:defRPr sz="1350"/>
-            </a:lvl6pPr>
-            <a:lvl7pPr>
-              <a:defRPr sz="1350"/>
-            </a:lvl7pPr>
-            <a:lvl8pPr>
-              <a:defRPr sz="1350"/>
-            </a:lvl8pPr>
-            <a:lvl9pPr>
-              <a:defRPr sz="1350"/>
-            </a:lvl9pPr>
-          </a:lstStyle>
+          <a:lstStyle/>
           <a:p>
             <a:pPr lvl="0"/>
             <a:r>
-              <a:rPr lang="en-US"/>
+              <a:rPr lang="en-GB"/>
               <a:t>Click to edit Master text styles</a:t>
             </a:r>
           </a:p>
           <a:p>
             <a:pPr lvl="1"/>
             <a:r>
-              <a:rPr lang="en-US"/>
+              <a:rPr lang="en-GB"/>
               <a:t>Second level</a:t>
             </a:r>
           </a:p>
           <a:p>
             <a:pPr lvl="2"/>
             <a:r>
-              <a:rPr lang="en-US"/>
+              <a:rPr lang="en-GB"/>
               <a:t>Third level</a:t>
             </a:r>
           </a:p>
           <a:p>
             <a:pPr lvl="3"/>
             <a:r>
-              <a:rPr lang="en-US"/>
+              <a:rPr lang="en-GB"/>
               <a:t>Fourth level</a:t>
             </a:r>
           </a:p>
           <a:p>
             <a:pPr lvl="4"/>
             <a:r>
-              <a:rPr lang="en-US"/>
+              <a:rPr lang="en-GB"/>
               <a:t>Fifth level</a:t>
             </a:r>
+            <a:endParaRPr lang="en-GB" dirty="0"/>
           </a:p>
         </p:txBody>
       </p:sp>
@@ -1289,75 +1231,48 @@
         </p:nvSpPr>
         <p:spPr>
           <a:xfrm>
-            <a:off x="4648200" y="1200151"/>
-            <a:ext cx="4038600" cy="3394472"/>
+            <a:off x="6172200" y="1825625"/>
+            <a:ext cx="5181600" cy="4351338"/>
           </a:xfrm>
         </p:spPr>
         <p:txBody>
           <a:bodyPr/>
-          <a:lstStyle>
-            <a:lvl1pPr>
-              <a:defRPr sz="2100"/>
-            </a:lvl1pPr>
-            <a:lvl2pPr>
-              <a:defRPr sz="1800"/>
-            </a:lvl2pPr>
-            <a:lvl3pPr>
-              <a:defRPr sz="1500"/>
-            </a:lvl3pPr>
-            <a:lvl4pPr>
-              <a:defRPr sz="1350"/>
-            </a:lvl4pPr>
-            <a:lvl5pPr>
-              <a:defRPr sz="1350"/>
-            </a:lvl5pPr>
-            <a:lvl6pPr>
-              <a:defRPr sz="1350"/>
-            </a:lvl6pPr>
-            <a:lvl7pPr>
-              <a:defRPr sz="1350"/>
-            </a:lvl7pPr>
-            <a:lvl8pPr>
-              <a:defRPr sz="1350"/>
-            </a:lvl8pPr>
-            <a:lvl9pPr>
-              <a:defRPr sz="1350"/>
-            </a:lvl9pPr>
-          </a:lstStyle>
+          <a:lstStyle/>
           <a:p>
             <a:pPr lvl="0"/>
             <a:r>
-              <a:rPr lang="en-US"/>
+              <a:rPr lang="en-GB"/>
               <a:t>Click to edit Master text styles</a:t>
             </a:r>
           </a:p>
           <a:p>
             <a:pPr lvl="1"/>
             <a:r>
-              <a:rPr lang="en-US"/>
+              <a:rPr lang="en-GB"/>
               <a:t>Second level</a:t>
             </a:r>
           </a:p>
           <a:p>
             <a:pPr lvl="2"/>
             <a:r>
-              <a:rPr lang="en-US"/>
+              <a:rPr lang="en-GB"/>
               <a:t>Third level</a:t>
             </a:r>
           </a:p>
           <a:p>
             <a:pPr lvl="3"/>
             <a:r>
-              <a:rPr lang="en-US"/>
+              <a:rPr lang="en-GB"/>
               <a:t>Fourth level</a:t>
             </a:r>
           </a:p>
           <a:p>
             <a:pPr lvl="4"/>
             <a:r>
-              <a:rPr lang="en-US"/>
+              <a:rPr lang="en-GB"/>
               <a:t>Fifth level</a:t>
             </a:r>
+            <a:endParaRPr lang="en-GB" dirty="0"/>
           </a:p>
         </p:txBody>
       </p:sp>
@@ -1376,11 +1291,11 @@
           <a:bodyPr/>
           <a:lstStyle/>
           <a:p>
-            <a:fld id="{241EB5C9-1307-BA42-ABA2-0BC069CD8E7F}" type="datetimeFigureOut">
-              <a:rPr lang="en-US" smtClean="0"/>
-              <a:t>1/2/22</a:t>
+            <a:fld id="{846CE7D5-CF57-46EF-B807-FDD0502418D4}" type="datetimeFigureOut">
+              <a:rPr lang="en-GB" smtClean="0"/>
+              <a:t>13/01/2026</a:t>
             </a:fld>
-            <a:endParaRPr lang="en-US"/>
+            <a:endParaRPr lang="en-GB"/>
           </a:p>
         </p:txBody>
       </p:sp>
@@ -1399,7 +1314,10 @@
           <a:bodyPr/>
           <a:lstStyle/>
           <a:p>
-            <a:endParaRPr lang="en-US"/>
+            <a:r>
+              <a:rPr lang="en-GB"/>
+              <a:t>Tâm Anh Oxford Partnership</a:t>
+            </a:r>
           </a:p>
         </p:txBody>
       </p:sp>
@@ -1418,24 +1336,25 @@
           <a:bodyPr/>
           <a:lstStyle/>
           <a:p>
-            <a:fld id="{C5EF2332-01BF-834F-8236-50238282D533}" type="slidenum">
-              <a:rPr lang="en-US" smtClean="0"/>
+            <a:fld id="{330EA680-D336-4FF7-8B7A-9848BB0A1C32}" type="slidenum">
+              <a:rPr lang="en-GB" smtClean="0"/>
               <a:t>‹#›</a:t>
             </a:fld>
-            <a:endParaRPr lang="en-US"/>
+            <a:endParaRPr lang="en-GB"/>
           </a:p>
         </p:txBody>
       </p:sp>
     </p:spTree>
     <p:extLst>
       <p:ext uri="{BB962C8B-B14F-4D97-AF65-F5344CB8AC3E}">
-        <p14:creationId xmlns:p14="http://schemas.microsoft.com/office/powerpoint/2010/main" val="2619886245"/>
+        <p14:creationId xmlns:p14="http://schemas.microsoft.com/office/powerpoint/2010/main" val="1203092039"/>
       </p:ext>
     </p:extLst>
   </p:cSld>
   <p:clrMapOvr>
     <a:masterClrMapping/>
   </p:clrMapOvr>
+  <p:hf hdr="0" dt="0"/>
 </p:sldLayout>
 </file>
 
@@ -1466,36 +1385,38 @@
             <p:ph type="title"/>
           </p:nvPr>
         </p:nvSpPr>
-        <p:spPr/>
-        <p:txBody>
-          <a:bodyPr/>
-          <a:lstStyle>
-            <a:lvl1pPr>
-              <a:defRPr/>
-            </a:lvl1pPr>
-          </a:lstStyle>
-          <a:p>
-            <a:r>
-              <a:rPr lang="en-US"/>
-              <a:t>Click to edit Master title style</a:t>
-            </a:r>
-          </a:p>
-        </p:txBody>
-      </p:sp>
-      <p:sp>
-        <p:nvSpPr>
-          <p:cNvPr id="3" name="Text Placeholder 2"/>
-          <p:cNvSpPr>
-            <a:spLocks noGrp="1"/>
-          </p:cNvSpPr>
-          <p:nvPr>
-            <p:ph type="body" idx="1"/>
-          </p:nvPr>
-        </p:nvSpPr>
         <p:spPr>
           <a:xfrm>
-            <a:off x="457200" y="1151335"/>
-            <a:ext cx="4040188" cy="479822"/>
+            <a:off x="839788" y="365125"/>
+            <a:ext cx="10515600" cy="1325563"/>
+          </a:xfrm>
+        </p:spPr>
+        <p:txBody>
+          <a:bodyPr/>
+          <a:lstStyle/>
+          <a:p>
+            <a:r>
+              <a:rPr lang="en-GB"/>
+              <a:t>Click to edit Master title style</a:t>
+            </a:r>
+            <a:endParaRPr lang="en-GB" dirty="0"/>
+          </a:p>
+        </p:txBody>
+      </p:sp>
+      <p:sp>
+        <p:nvSpPr>
+          <p:cNvPr id="3" name="Text Placeholder 2"/>
+          <p:cNvSpPr>
+            <a:spLocks noGrp="1"/>
+          </p:cNvSpPr>
+          <p:nvPr>
+            <p:ph type="body" idx="1"/>
+          </p:nvPr>
+        </p:nvSpPr>
+        <p:spPr>
+          <a:xfrm>
+            <a:off x="839788" y="1681163"/>
+            <a:ext cx="5157787" cy="823912"/>
           </a:xfrm>
         </p:spPr>
         <p:txBody>
@@ -1503,45 +1424,45 @@
           <a:lstStyle>
             <a:lvl1pPr marL="0" indent="0">
               <a:buNone/>
+              <a:defRPr sz="2400" b="1"/>
+            </a:lvl1pPr>
+            <a:lvl2pPr marL="457200" indent="0">
+              <a:buNone/>
+              <a:defRPr sz="2000" b="1"/>
+            </a:lvl2pPr>
+            <a:lvl3pPr marL="914400" indent="0">
+              <a:buNone/>
               <a:defRPr sz="1800" b="1"/>
-            </a:lvl1pPr>
-            <a:lvl2pPr marL="342900" indent="0">
-              <a:buNone/>
-              <a:defRPr sz="1500" b="1"/>
-            </a:lvl2pPr>
-            <a:lvl3pPr marL="685800" indent="0">
-              <a:buNone/>
-              <a:defRPr sz="1350" b="1"/>
             </a:lvl3pPr>
-            <a:lvl4pPr marL="1028700" indent="0">
-              <a:buNone/>
-              <a:defRPr sz="1200" b="1"/>
+            <a:lvl4pPr marL="1371600" indent="0">
+              <a:buNone/>
+              <a:defRPr sz="1600" b="1"/>
             </a:lvl4pPr>
-            <a:lvl5pPr marL="1371600" indent="0">
-              <a:buNone/>
-              <a:defRPr sz="1200" b="1"/>
+            <a:lvl5pPr marL="1828800" indent="0">
+              <a:buNone/>
+              <a:defRPr sz="1600" b="1"/>
             </a:lvl5pPr>
-            <a:lvl6pPr marL="1714500" indent="0">
-              <a:buNone/>
-              <a:defRPr sz="1200" b="1"/>
+            <a:lvl6pPr marL="2286000" indent="0">
+              <a:buNone/>
+              <a:defRPr sz="1600" b="1"/>
             </a:lvl6pPr>
-            <a:lvl7pPr marL="2057400" indent="0">
-              <a:buNone/>
-              <a:defRPr sz="1200" b="1"/>
+            <a:lvl7pPr marL="2743200" indent="0">
+              <a:buNone/>
+              <a:defRPr sz="1600" b="1"/>
             </a:lvl7pPr>
-            <a:lvl8pPr marL="2400300" indent="0">
-              <a:buNone/>
-              <a:defRPr sz="1200" b="1"/>
+            <a:lvl8pPr marL="3200400" indent="0">
+              <a:buNone/>
+              <a:defRPr sz="1600" b="1"/>
             </a:lvl8pPr>
-            <a:lvl9pPr marL="2743200" indent="0">
-              <a:buNone/>
-              <a:defRPr sz="1200" b="1"/>
+            <a:lvl9pPr marL="3657600" indent="0">
+              <a:buNone/>
+              <a:defRPr sz="1600" b="1"/>
             </a:lvl9pPr>
           </a:lstStyle>
           <a:p>
             <a:pPr lvl="0"/>
             <a:r>
-              <a:rPr lang="en-US"/>
+              <a:rPr lang="en-GB"/>
               <a:t>Click to edit Master text styles</a:t>
             </a:r>
           </a:p>
@@ -1559,75 +1480,48 @@
         </p:nvSpPr>
         <p:spPr>
           <a:xfrm>
-            <a:off x="457200" y="1631156"/>
-            <a:ext cx="4040188" cy="2963466"/>
+            <a:off x="839788" y="2505075"/>
+            <a:ext cx="5157787" cy="3684588"/>
           </a:xfrm>
         </p:spPr>
         <p:txBody>
           <a:bodyPr/>
-          <a:lstStyle>
-            <a:lvl1pPr>
-              <a:defRPr sz="1800"/>
-            </a:lvl1pPr>
-            <a:lvl2pPr>
-              <a:defRPr sz="1500"/>
-            </a:lvl2pPr>
-            <a:lvl3pPr>
-              <a:defRPr sz="1350"/>
-            </a:lvl3pPr>
-            <a:lvl4pPr>
-              <a:defRPr sz="1200"/>
-            </a:lvl4pPr>
-            <a:lvl5pPr>
-              <a:defRPr sz="1200"/>
-            </a:lvl5pPr>
-            <a:lvl6pPr>
-              <a:defRPr sz="1200"/>
-            </a:lvl6pPr>
-            <a:lvl7pPr>
-              <a:defRPr sz="1200"/>
-            </a:lvl7pPr>
-            <a:lvl8pPr>
-              <a:defRPr sz="1200"/>
-            </a:lvl8pPr>
-            <a:lvl9pPr>
-              <a:defRPr sz="1200"/>
-            </a:lvl9pPr>
-          </a:lstStyle>
+          <a:lstStyle/>
           <a:p>
             <a:pPr lvl="0"/>
             <a:r>
-              <a:rPr lang="en-US"/>
+              <a:rPr lang="en-GB"/>
               <a:t>Click to edit Master text styles</a:t>
             </a:r>
           </a:p>
           <a:p>
             <a:pPr lvl="1"/>
             <a:r>
-              <a:rPr lang="en-US"/>
+              <a:rPr lang="en-GB"/>
               <a:t>Second level</a:t>
             </a:r>
           </a:p>
           <a:p>
             <a:pPr lvl="2"/>
             <a:r>
-              <a:rPr lang="en-US"/>
+              <a:rPr lang="en-GB"/>
               <a:t>Third level</a:t>
             </a:r>
           </a:p>
           <a:p>
             <a:pPr lvl="3"/>
             <a:r>
-              <a:rPr lang="en-US"/>
+              <a:rPr lang="en-GB"/>
               <a:t>Fourth level</a:t>
             </a:r>
           </a:p>
           <a:p>
             <a:pPr lvl="4"/>
             <a:r>
-              <a:rPr lang="en-US"/>
+              <a:rPr lang="en-GB"/>
               <a:t>Fifth level</a:t>
             </a:r>
+            <a:endParaRPr lang="en-GB" dirty="0"/>
           </a:p>
         </p:txBody>
       </p:sp>
@@ -1643,8 +1537,8 @@
         </p:nvSpPr>
         <p:spPr>
           <a:xfrm>
-            <a:off x="4645026" y="1151335"/>
-            <a:ext cx="4041775" cy="479822"/>
+            <a:off x="6172200" y="1681163"/>
+            <a:ext cx="5183188" cy="823912"/>
           </a:xfrm>
         </p:spPr>
         <p:txBody>
@@ -1652,45 +1546,45 @@
           <a:lstStyle>
             <a:lvl1pPr marL="0" indent="0">
               <a:buNone/>
+              <a:defRPr sz="2400" b="1"/>
+            </a:lvl1pPr>
+            <a:lvl2pPr marL="457200" indent="0">
+              <a:buNone/>
+              <a:defRPr sz="2000" b="1"/>
+            </a:lvl2pPr>
+            <a:lvl3pPr marL="914400" indent="0">
+              <a:buNone/>
               <a:defRPr sz="1800" b="1"/>
-            </a:lvl1pPr>
-            <a:lvl2pPr marL="342900" indent="0">
-              <a:buNone/>
-              <a:defRPr sz="1500" b="1"/>
-            </a:lvl2pPr>
-            <a:lvl3pPr marL="685800" indent="0">
-              <a:buNone/>
-              <a:defRPr sz="1350" b="1"/>
             </a:lvl3pPr>
-            <a:lvl4pPr marL="1028700" indent="0">
-              <a:buNone/>
-              <a:defRPr sz="1200" b="1"/>
+            <a:lvl4pPr marL="1371600" indent="0">
+              <a:buNone/>
+              <a:defRPr sz="1600" b="1"/>
             </a:lvl4pPr>
-            <a:lvl5pPr marL="1371600" indent="0">
-              <a:buNone/>
-              <a:defRPr sz="1200" b="1"/>
+            <a:lvl5pPr marL="1828800" indent="0">
+              <a:buNone/>
+              <a:defRPr sz="1600" b="1"/>
             </a:lvl5pPr>
-            <a:lvl6pPr marL="1714500" indent="0">
-              <a:buNone/>
-              <a:defRPr sz="1200" b="1"/>
+            <a:lvl6pPr marL="2286000" indent="0">
+              <a:buNone/>
+              <a:defRPr sz="1600" b="1"/>
             </a:lvl6pPr>
-            <a:lvl7pPr marL="2057400" indent="0">
-              <a:buNone/>
-              <a:defRPr sz="1200" b="1"/>
+            <a:lvl7pPr marL="2743200" indent="0">
+              <a:buNone/>
+              <a:defRPr sz="1600" b="1"/>
             </a:lvl7pPr>
-            <a:lvl8pPr marL="2400300" indent="0">
-              <a:buNone/>
-              <a:defRPr sz="1200" b="1"/>
+            <a:lvl8pPr marL="3200400" indent="0">
+              <a:buNone/>
+              <a:defRPr sz="1600" b="1"/>
             </a:lvl8pPr>
-            <a:lvl9pPr marL="2743200" indent="0">
-              <a:buNone/>
-              <a:defRPr sz="1200" b="1"/>
+            <a:lvl9pPr marL="3657600" indent="0">
+              <a:buNone/>
+              <a:defRPr sz="1600" b="1"/>
             </a:lvl9pPr>
           </a:lstStyle>
           <a:p>
             <a:pPr lvl="0"/>
             <a:r>
-              <a:rPr lang="en-US"/>
+              <a:rPr lang="en-GB"/>
               <a:t>Click to edit Master text styles</a:t>
             </a:r>
           </a:p>
@@ -1708,75 +1602,48 @@
         </p:nvSpPr>
         <p:spPr>
           <a:xfrm>
-            <a:off x="4645026" y="1631156"/>
-            <a:ext cx="4041775" cy="2963466"/>
+            <a:off x="6172200" y="2505075"/>
+            <a:ext cx="5183188" cy="3684588"/>
           </a:xfrm>
         </p:spPr>
         <p:txBody>
           <a:bodyPr/>
-          <a:lstStyle>
-            <a:lvl1pPr>
-              <a:defRPr sz="1800"/>
-            </a:lvl1pPr>
-            <a:lvl2pPr>
-              <a:defRPr sz="1500"/>
-            </a:lvl2pPr>
-            <a:lvl3pPr>
-              <a:defRPr sz="1350"/>
-            </a:lvl3pPr>
-            <a:lvl4pPr>
-              <a:defRPr sz="1200"/>
-            </a:lvl4pPr>
-            <a:lvl5pPr>
-              <a:defRPr sz="1200"/>
-            </a:lvl5pPr>
-            <a:lvl6pPr>
-              <a:defRPr sz="1200"/>
-            </a:lvl6pPr>
-            <a:lvl7pPr>
-              <a:defRPr sz="1200"/>
-            </a:lvl7pPr>
-            <a:lvl8pPr>
-              <a:defRPr sz="1200"/>
-            </a:lvl8pPr>
-            <a:lvl9pPr>
-              <a:defRPr sz="1200"/>
-            </a:lvl9pPr>
-          </a:lstStyle>
+          <a:lstStyle/>
           <a:p>
             <a:pPr lvl="0"/>
             <a:r>
-              <a:rPr lang="en-US"/>
+              <a:rPr lang="en-GB"/>
               <a:t>Click to edit Master text styles</a:t>
             </a:r>
           </a:p>
           <a:p>
             <a:pPr lvl="1"/>
             <a:r>
-              <a:rPr lang="en-US"/>
+              <a:rPr lang="en-GB"/>
               <a:t>Second level</a:t>
             </a:r>
           </a:p>
           <a:p>
             <a:pPr lvl="2"/>
             <a:r>
-              <a:rPr lang="en-US"/>
+              <a:rPr lang="en-GB"/>
               <a:t>Third level</a:t>
             </a:r>
           </a:p>
           <a:p>
             <a:pPr lvl="3"/>
             <a:r>
-              <a:rPr lang="en-US"/>
+              <a:rPr lang="en-GB"/>
               <a:t>Fourth level</a:t>
             </a:r>
           </a:p>
           <a:p>
             <a:pPr lvl="4"/>
             <a:r>
-              <a:rPr lang="en-US"/>
+              <a:rPr lang="en-GB"/>
               <a:t>Fifth level</a:t>
             </a:r>
+            <a:endParaRPr lang="en-GB" dirty="0"/>
           </a:p>
         </p:txBody>
       </p:sp>
@@ -1795,11 +1662,11 @@
           <a:bodyPr/>
           <a:lstStyle/>
           <a:p>
-            <a:fld id="{241EB5C9-1307-BA42-ABA2-0BC069CD8E7F}" type="datetimeFigureOut">
-              <a:rPr lang="en-US" smtClean="0"/>
-              <a:t>1/2/22</a:t>
+            <a:fld id="{846CE7D5-CF57-46EF-B807-FDD0502418D4}" type="datetimeFigureOut">
+              <a:rPr lang="en-GB" smtClean="0"/>
+              <a:t>13/01/2026</a:t>
             </a:fld>
-            <a:endParaRPr lang="en-US"/>
+            <a:endParaRPr lang="en-GB"/>
           </a:p>
         </p:txBody>
       </p:sp>
@@ -1818,7 +1685,10 @@
           <a:bodyPr/>
           <a:lstStyle/>
           <a:p>
-            <a:endParaRPr lang="en-US"/>
+            <a:r>
+              <a:rPr lang="en-GB"/>
+              <a:t>Tâm Anh Oxford Partnership</a:t>
+            </a:r>
           </a:p>
         </p:txBody>
       </p:sp>
@@ -1837,24 +1707,25 @@
           <a:bodyPr/>
           <a:lstStyle/>
           <a:p>
-            <a:fld id="{C5EF2332-01BF-834F-8236-50238282D533}" type="slidenum">
-              <a:rPr lang="en-US" smtClean="0"/>
+            <a:fld id="{330EA680-D336-4FF7-8B7A-9848BB0A1C32}" type="slidenum">
+              <a:rPr lang="en-GB" smtClean="0"/>
               <a:t>‹#›</a:t>
             </a:fld>
-            <a:endParaRPr lang="en-US"/>
+            <a:endParaRPr lang="en-GB"/>
           </a:p>
         </p:txBody>
       </p:sp>
     </p:spTree>
     <p:extLst>
       <p:ext uri="{BB962C8B-B14F-4D97-AF65-F5344CB8AC3E}">
-        <p14:creationId xmlns:p14="http://schemas.microsoft.com/office/powerpoint/2010/main" val="2535793967"/>
+        <p14:creationId xmlns:p14="http://schemas.microsoft.com/office/powerpoint/2010/main" val="3733172339"/>
       </p:ext>
     </p:extLst>
   </p:cSld>
   <p:clrMapOvr>
     <a:masterClrMapping/>
   </p:clrMapOvr>
+  <p:hf hdr="0" dt="0"/>
 </p:sldLayout>
 </file>
 
@@ -1891,9 +1762,10 @@
           <a:lstStyle/>
           <a:p>
             <a:r>
-              <a:rPr lang="en-US"/>
+              <a:rPr lang="en-GB"/>
               <a:t>Click to edit Master title style</a:t>
             </a:r>
+            <a:endParaRPr lang="en-GB" dirty="0"/>
           </a:p>
         </p:txBody>
       </p:sp>
@@ -1912,11 +1784,11 @@
           <a:bodyPr/>
           <a:lstStyle/>
           <a:p>
-            <a:fld id="{241EB5C9-1307-BA42-ABA2-0BC069CD8E7F}" type="datetimeFigureOut">
-              <a:rPr lang="en-US" smtClean="0"/>
-              <a:t>1/2/22</a:t>
+            <a:fld id="{846CE7D5-CF57-46EF-B807-FDD0502418D4}" type="datetimeFigureOut">
+              <a:rPr lang="en-GB" smtClean="0"/>
+              <a:t>13/01/2026</a:t>
             </a:fld>
-            <a:endParaRPr lang="en-US"/>
+            <a:endParaRPr lang="en-GB"/>
           </a:p>
         </p:txBody>
       </p:sp>
@@ -1935,7 +1807,10 @@
           <a:bodyPr/>
           <a:lstStyle/>
           <a:p>
-            <a:endParaRPr lang="en-US"/>
+            <a:r>
+              <a:rPr lang="en-GB"/>
+              <a:t>Tâm Anh Oxford Partnership</a:t>
+            </a:r>
           </a:p>
         </p:txBody>
       </p:sp>
@@ -1954,24 +1829,25 @@
           <a:bodyPr/>
           <a:lstStyle/>
           <a:p>
-            <a:fld id="{C5EF2332-01BF-834F-8236-50238282D533}" type="slidenum">
-              <a:rPr lang="en-US" smtClean="0"/>
+            <a:fld id="{330EA680-D336-4FF7-8B7A-9848BB0A1C32}" type="slidenum">
+              <a:rPr lang="en-GB" smtClean="0"/>
               <a:t>‹#›</a:t>
             </a:fld>
-            <a:endParaRPr lang="en-US"/>
+            <a:endParaRPr lang="en-GB"/>
           </a:p>
         </p:txBody>
       </p:sp>
     </p:spTree>
     <p:extLst>
       <p:ext uri="{BB962C8B-B14F-4D97-AF65-F5344CB8AC3E}">
-        <p14:creationId xmlns:p14="http://schemas.microsoft.com/office/powerpoint/2010/main" val="3472721253"/>
+        <p14:creationId xmlns:p14="http://schemas.microsoft.com/office/powerpoint/2010/main" val="3210312558"/>
       </p:ext>
     </p:extLst>
   </p:cSld>
   <p:clrMapOvr>
     <a:masterClrMapping/>
   </p:clrMapOvr>
+  <p:hf hdr="0" dt="0"/>
 </p:sldLayout>
 </file>
 
@@ -2007,11 +1883,11 @@
           <a:bodyPr/>
           <a:lstStyle/>
           <a:p>
-            <a:fld id="{241EB5C9-1307-BA42-ABA2-0BC069CD8E7F}" type="datetimeFigureOut">
-              <a:rPr lang="en-US" smtClean="0"/>
-              <a:t>1/2/22</a:t>
+            <a:fld id="{846CE7D5-CF57-46EF-B807-FDD0502418D4}" type="datetimeFigureOut">
+              <a:rPr lang="en-GB" smtClean="0"/>
+              <a:t>13/01/2026</a:t>
             </a:fld>
-            <a:endParaRPr lang="en-US"/>
+            <a:endParaRPr lang="en-GB"/>
           </a:p>
         </p:txBody>
       </p:sp>
@@ -2030,7 +1906,10 @@
           <a:bodyPr/>
           <a:lstStyle/>
           <a:p>
-            <a:endParaRPr lang="en-US"/>
+            <a:r>
+              <a:rPr lang="en-GB"/>
+              <a:t>Tâm Anh Oxford Partnership</a:t>
+            </a:r>
           </a:p>
         </p:txBody>
       </p:sp>
@@ -2049,24 +1928,25 @@
           <a:bodyPr/>
           <a:lstStyle/>
           <a:p>
-            <a:fld id="{C5EF2332-01BF-834F-8236-50238282D533}" type="slidenum">
-              <a:rPr lang="en-US" smtClean="0"/>
+            <a:fld id="{330EA680-D336-4FF7-8B7A-9848BB0A1C32}" type="slidenum">
+              <a:rPr lang="en-GB" smtClean="0"/>
               <a:t>‹#›</a:t>
             </a:fld>
-            <a:endParaRPr lang="en-US"/>
+            <a:endParaRPr lang="en-GB"/>
           </a:p>
         </p:txBody>
       </p:sp>
     </p:spTree>
     <p:extLst>
       <p:ext uri="{BB962C8B-B14F-4D97-AF65-F5344CB8AC3E}">
-        <p14:creationId xmlns:p14="http://schemas.microsoft.com/office/powerpoint/2010/main" val="2130901097"/>
+        <p14:creationId xmlns:p14="http://schemas.microsoft.com/office/powerpoint/2010/main" val="3146388984"/>
       </p:ext>
     </p:extLst>
   </p:cSld>
   <p:clrMapOvr>
     <a:masterClrMapping/>
   </p:clrMapOvr>
+  <p:hf hdr="0" dt="0"/>
 </p:sldLayout>
 </file>
 
@@ -2099,22 +1979,23 @@
         </p:nvSpPr>
         <p:spPr>
           <a:xfrm>
-            <a:off x="457201" y="204787"/>
-            <a:ext cx="3008313" cy="871538"/>
+            <a:off x="839788" y="457200"/>
+            <a:ext cx="3932237" cy="1600200"/>
           </a:xfrm>
         </p:spPr>
         <p:txBody>
           <a:bodyPr anchor="b"/>
           <a:lstStyle>
-            <a:lvl1pPr algn="l">
-              <a:defRPr sz="1500" b="1"/>
+            <a:lvl1pPr>
+              <a:defRPr sz="3200"/>
             </a:lvl1pPr>
           </a:lstStyle>
           <a:p>
             <a:r>
-              <a:rPr lang="en-US"/>
+              <a:rPr lang="en-GB"/>
               <a:t>Click to edit Master title style</a:t>
             </a:r>
+            <a:endParaRPr lang="en-GB" dirty="0"/>
           </a:p>
         </p:txBody>
       </p:sp>
@@ -2130,75 +2011,76 @@
         </p:nvSpPr>
         <p:spPr>
           <a:xfrm>
-            <a:off x="3575050" y="204788"/>
-            <a:ext cx="5111750" cy="4389835"/>
+            <a:off x="5183188" y="987425"/>
+            <a:ext cx="6172200" cy="4873625"/>
           </a:xfrm>
         </p:spPr>
         <p:txBody>
           <a:bodyPr/>
           <a:lstStyle>
             <a:lvl1pPr>
-              <a:defRPr sz="2400"/>
+              <a:defRPr sz="3200"/>
             </a:lvl1pPr>
             <a:lvl2pPr>
-              <a:defRPr sz="2100"/>
+              <a:defRPr sz="2800"/>
             </a:lvl2pPr>
             <a:lvl3pPr>
-              <a:defRPr sz="1800"/>
+              <a:defRPr sz="2400"/>
             </a:lvl3pPr>
             <a:lvl4pPr>
-              <a:defRPr sz="1500"/>
+              <a:defRPr sz="2000"/>
             </a:lvl4pPr>
             <a:lvl5pPr>
-              <a:defRPr sz="1500"/>
+              <a:defRPr sz="2000"/>
             </a:lvl5pPr>
             <a:lvl6pPr>
-              <a:defRPr sz="1500"/>
+              <a:defRPr sz="2000"/>
             </a:lvl6pPr>
             <a:lvl7pPr>
-              <a:defRPr sz="1500"/>
+              <a:defRPr sz="2000"/>
             </a:lvl7pPr>
             <a:lvl8pPr>
-              <a:defRPr sz="1500"/>
+              <a:defRPr sz="2000"/>
             </a:lvl8pPr>
             <a:lvl9pPr>
-              <a:defRPr sz="1500"/>
+              <a:defRPr sz="2000"/>
             </a:lvl9pPr>
           </a:lstStyle>
           <a:p>
             <a:pPr lvl="0"/>
             <a:r>
-              <a:rPr lang="en-US"/>
+              <a:rPr lang="en-GB"/>
               <a:t>Click to edit Master text styles</a:t>
             </a:r>
           </a:p>
           <a:p>
             <a:pPr lvl="1"/>
             <a:r>
-              <a:rPr lang="en-US"/>
+              <a:rPr lang="en-GB"/>
               <a:t>Second level</a:t>
             </a:r>
           </a:p>
           <a:p>
             <a:pPr lvl="2"/>
             <a:r>
-              <a:rPr lang="en-US"/>
+              <a:rPr lang="en-GB"/>
               <a:t>Third level</a:t>
             </a:r>
           </a:p>
           <a:p>
             <a:pPr lvl="3"/>
             <a:r>
-              <a:rPr lang="en-US"/>
+              <a:rPr lang="en-GB"/>
               <a:t>Fourth level</a:t>
             </a:r>
           </a:p>
           <a:p>
             <a:pPr lvl="4"/>
             <a:r>
-              <a:rPr lang="en-US"/>
+              <a:rPr lang="en-GB"/>
               <a:t>Fifth level</a:t>
             </a:r>
+            <a:endParaRPr lang="en-GB" dirty="0"/>
           </a:p>
         </p:txBody>
       </p:sp>
@@ -2214,8 +2096,8 @@
         </p:nvSpPr>
         <p:spPr>
           <a:xfrm>
-            <a:off x="457201" y="1076326"/>
-            <a:ext cx="3008313" cy="3518297"/>
+            <a:off x="839788" y="2057400"/>
+            <a:ext cx="3932237" cy="3811588"/>
           </a:xfrm>
         </p:spPr>
         <p:txBody>
@@ -2223,45 +2105,45 @@
           <a:lstStyle>
             <a:lvl1pPr marL="0" indent="0">
               <a:buNone/>
-              <a:defRPr sz="1050"/>
+              <a:defRPr sz="1600"/>
             </a:lvl1pPr>
-            <a:lvl2pPr marL="342900" indent="0">
-              <a:buNone/>
-              <a:defRPr sz="900"/>
+            <a:lvl2pPr marL="457200" indent="0">
+              <a:buNone/>
+              <a:defRPr sz="1400"/>
             </a:lvl2pPr>
-            <a:lvl3pPr marL="685800" indent="0">
-              <a:buNone/>
-              <a:defRPr sz="750"/>
+            <a:lvl3pPr marL="914400" indent="0">
+              <a:buNone/>
+              <a:defRPr sz="1200"/>
             </a:lvl3pPr>
-            <a:lvl4pPr marL="1028700" indent="0">
-              <a:buNone/>
-              <a:defRPr sz="675"/>
+            <a:lvl4pPr marL="1371600" indent="0">
+              <a:buNone/>
+              <a:defRPr sz="1000"/>
             </a:lvl4pPr>
-            <a:lvl5pPr marL="1371600" indent="0">
-              <a:buNone/>
-              <a:defRPr sz="675"/>
+            <a:lvl5pPr marL="1828800" indent="0">
+              <a:buNone/>
+              <a:defRPr sz="1000"/>
             </a:lvl5pPr>
-            <a:lvl6pPr marL="1714500" indent="0">
-              <a:buNone/>
-              <a:defRPr sz="675"/>
+            <a:lvl6pPr marL="2286000" indent="0">
+              <a:buNone/>
+              <a:defRPr sz="1000"/>
             </a:lvl6pPr>
-            <a:lvl7pPr marL="2057400" indent="0">
-              <a:buNone/>
-              <a:defRPr sz="675"/>
+            <a:lvl7pPr marL="2743200" indent="0">
+              <a:buNone/>
+              <a:defRPr sz="1000"/>
             </a:lvl7pPr>
-            <a:lvl8pPr marL="2400300" indent="0">
-              <a:buNone/>
-              <a:defRPr sz="675"/>
+            <a:lvl8pPr marL="3200400" indent="0">
+              <a:buNone/>
+              <a:defRPr sz="1000"/>
             </a:lvl8pPr>
-            <a:lvl9pPr marL="2743200" indent="0">
-              <a:buNone/>
-              <a:defRPr sz="675"/>
+            <a:lvl9pPr marL="3657600" indent="0">
+              <a:buNone/>
+              <a:defRPr sz="1000"/>
             </a:lvl9pPr>
           </a:lstStyle>
           <a:p>
             <a:pPr lvl="0"/>
             <a:r>
-              <a:rPr lang="en-US"/>
+              <a:rPr lang="en-GB"/>
               <a:t>Click to edit Master text styles</a:t>
             </a:r>
           </a:p>
@@ -2282,11 +2164,11 @@
           <a:bodyPr/>
           <a:lstStyle/>
           <a:p>
-            <a:fld id="{241EB5C9-1307-BA42-ABA2-0BC069CD8E7F}" type="datetimeFigureOut">
-              <a:rPr lang="en-US" smtClean="0"/>
-              <a:t>1/2/22</a:t>
+            <a:fld id="{846CE7D5-CF57-46EF-B807-FDD0502418D4}" type="datetimeFigureOut">
+              <a:rPr lang="en-GB" smtClean="0"/>
+              <a:t>13/01/2026</a:t>
             </a:fld>
-            <a:endParaRPr lang="en-US"/>
+            <a:endParaRPr lang="en-GB"/>
           </a:p>
         </p:txBody>
       </p:sp>
@@ -2305,7 +2187,10 @@
           <a:bodyPr/>
           <a:lstStyle/>
           <a:p>
-            <a:endParaRPr lang="en-US"/>
+            <a:r>
+              <a:rPr lang="en-GB"/>
+              <a:t>Tâm Anh Oxford Partnership</a:t>
+            </a:r>
           </a:p>
         </p:txBody>
       </p:sp>
@@ -2324,24 +2209,25 @@
           <a:bodyPr/>
           <a:lstStyle/>
           <a:p>
-            <a:fld id="{C5EF2332-01BF-834F-8236-50238282D533}" type="slidenum">
-              <a:rPr lang="en-US" smtClean="0"/>
+            <a:fld id="{330EA680-D336-4FF7-8B7A-9848BB0A1C32}" type="slidenum">
+              <a:rPr lang="en-GB" smtClean="0"/>
               <a:t>‹#›</a:t>
             </a:fld>
-            <a:endParaRPr lang="en-US"/>
+            <a:endParaRPr lang="en-GB"/>
           </a:p>
         </p:txBody>
       </p:sp>
     </p:spTree>
     <p:extLst>
       <p:ext uri="{BB962C8B-B14F-4D97-AF65-F5344CB8AC3E}">
-        <p14:creationId xmlns:p14="http://schemas.microsoft.com/office/powerpoint/2010/main" val="3540895647"/>
+        <p14:creationId xmlns:p14="http://schemas.microsoft.com/office/powerpoint/2010/main" val="3171841454"/>
       </p:ext>
     </p:extLst>
   </p:cSld>
   <p:clrMapOvr>
     <a:masterClrMapping/>
   </p:clrMapOvr>
+  <p:hf hdr="0" dt="0"/>
 </p:sldLayout>
 </file>
 
@@ -2374,22 +2260,23 @@
         </p:nvSpPr>
         <p:spPr>
           <a:xfrm>
-            <a:off x="1792288" y="3600450"/>
-            <a:ext cx="5486400" cy="425054"/>
+            <a:off x="839788" y="457200"/>
+            <a:ext cx="3932237" cy="1600200"/>
           </a:xfrm>
         </p:spPr>
         <p:txBody>
           <a:bodyPr anchor="b"/>
           <a:lstStyle>
-            <a:lvl1pPr algn="l">
-              <a:defRPr sz="1500" b="1"/>
+            <a:lvl1pPr>
+              <a:defRPr sz="3200"/>
             </a:lvl1pPr>
           </a:lstStyle>
           <a:p>
             <a:r>
-              <a:rPr lang="en-US"/>
+              <a:rPr lang="en-GB"/>
               <a:t>Click to edit Master title style</a:t>
             </a:r>
+            <a:endParaRPr lang="en-GB" dirty="0"/>
           </a:p>
         </p:txBody>
       </p:sp>
@@ -2397,7 +2284,7 @@
         <p:nvSpPr>
           <p:cNvPr id="3" name="Picture Placeholder 2"/>
           <p:cNvSpPr>
-            <a:spLocks noGrp="1"/>
+            <a:spLocks noGrp="1" noChangeAspect="1"/>
           </p:cNvSpPr>
           <p:nvPr>
             <p:ph type="pic" idx="1"/>
@@ -2405,52 +2292,56 @@
         </p:nvSpPr>
         <p:spPr>
           <a:xfrm>
-            <a:off x="1792288" y="459581"/>
-            <a:ext cx="5486400" cy="3086100"/>
+            <a:off x="5183188" y="987425"/>
+            <a:ext cx="6172200" cy="4873625"/>
           </a:xfrm>
         </p:spPr>
         <p:txBody>
-          <a:bodyPr/>
+          <a:bodyPr anchor="t"/>
           <a:lstStyle>
             <a:lvl1pPr marL="0" indent="0">
               <a:buNone/>
+              <a:defRPr sz="3200"/>
+            </a:lvl1pPr>
+            <a:lvl2pPr marL="457200" indent="0">
+              <a:buNone/>
+              <a:defRPr sz="2800"/>
+            </a:lvl2pPr>
+            <a:lvl3pPr marL="914400" indent="0">
+              <a:buNone/>
               <a:defRPr sz="2400"/>
-            </a:lvl1pPr>
-            <a:lvl2pPr marL="342900" indent="0">
-              <a:buNone/>
-              <a:defRPr sz="2100"/>
-            </a:lvl2pPr>
-            <a:lvl3pPr marL="685800" indent="0">
-              <a:buNone/>
-              <a:defRPr sz="1800"/>
             </a:lvl3pPr>
-            <a:lvl4pPr marL="1028700" indent="0">
-              <a:buNone/>
-              <a:defRPr sz="1500"/>
+            <a:lvl4pPr marL="1371600" indent="0">
+              <a:buNone/>
+              <a:defRPr sz="2000"/>
             </a:lvl4pPr>
-            <a:lvl5pPr marL="1371600" indent="0">
-              <a:buNone/>
-              <a:defRPr sz="1500"/>
+            <a:lvl5pPr marL="1828800" indent="0">
+              <a:buNone/>
+              <a:defRPr sz="2000"/>
             </a:lvl5pPr>
-            <a:lvl6pPr marL="1714500" indent="0">
-              <a:buNone/>
-              <a:defRPr sz="1500"/>
+            <a:lvl6pPr marL="2286000" indent="0">
+              <a:buNone/>
+              <a:defRPr sz="2000"/>
             </a:lvl6pPr>
-            <a:lvl7pPr marL="2057400" indent="0">
-              <a:buNone/>
-              <a:defRPr sz="1500"/>
+            <a:lvl7pPr marL="2743200" indent="0">
+              <a:buNone/>
+              <a:defRPr sz="2000"/>
             </a:lvl7pPr>
-            <a:lvl8pPr marL="2400300" indent="0">
-              <a:buNone/>
-              <a:defRPr sz="1500"/>
+            <a:lvl8pPr marL="3200400" indent="0">
+              <a:buNone/>
+              <a:defRPr sz="2000"/>
             </a:lvl8pPr>
-            <a:lvl9pPr marL="2743200" indent="0">
-              <a:buNone/>
-              <a:defRPr sz="1500"/>
+            <a:lvl9pPr marL="3657600" indent="0">
+              <a:buNone/>
+              <a:defRPr sz="2000"/>
             </a:lvl9pPr>
           </a:lstStyle>
           <a:p>
-            <a:endParaRPr lang="en-US"/>
+            <a:r>
+              <a:rPr lang="en-GB"/>
+              <a:t>Click icon to add picture</a:t>
+            </a:r>
+            <a:endParaRPr lang="en-GB" dirty="0"/>
           </a:p>
         </p:txBody>
       </p:sp>
@@ -2466,8 +2357,8 @@
         </p:nvSpPr>
         <p:spPr>
           <a:xfrm>
-            <a:off x="1792288" y="4025503"/>
-            <a:ext cx="5486400" cy="603647"/>
+            <a:off x="839788" y="2057400"/>
+            <a:ext cx="3932237" cy="3811588"/>
           </a:xfrm>
         </p:spPr>
         <p:txBody>
@@ -2475,45 +2366,45 @@
           <a:lstStyle>
             <a:lvl1pPr marL="0" indent="0">
               <a:buNone/>
-              <a:defRPr sz="1050"/>
+              <a:defRPr sz="1600"/>
             </a:lvl1pPr>
-            <a:lvl2pPr marL="342900" indent="0">
-              <a:buNone/>
-              <a:defRPr sz="900"/>
+            <a:lvl2pPr marL="457200" indent="0">
+              <a:buNone/>
+              <a:defRPr sz="1400"/>
             </a:lvl2pPr>
-            <a:lvl3pPr marL="685800" indent="0">
-              <a:buNone/>
-              <a:defRPr sz="750"/>
+            <a:lvl3pPr marL="914400" indent="0">
+              <a:buNone/>
+              <a:defRPr sz="1200"/>
             </a:lvl3pPr>
-            <a:lvl4pPr marL="1028700" indent="0">
-              <a:buNone/>
-              <a:defRPr sz="675"/>
+            <a:lvl4pPr marL="1371600" indent="0">
+              <a:buNone/>
+              <a:defRPr sz="1000"/>
             </a:lvl4pPr>
-            <a:lvl5pPr marL="1371600" indent="0">
-              <a:buNone/>
-              <a:defRPr sz="675"/>
+            <a:lvl5pPr marL="1828800" indent="0">
+              <a:buNone/>
+              <a:defRPr sz="1000"/>
             </a:lvl5pPr>
-            <a:lvl6pPr marL="1714500" indent="0">
-              <a:buNone/>
-              <a:defRPr sz="675"/>
+            <a:lvl6pPr marL="2286000" indent="0">
+              <a:buNone/>
+              <a:defRPr sz="1000"/>
             </a:lvl6pPr>
-            <a:lvl7pPr marL="2057400" indent="0">
-              <a:buNone/>
-              <a:defRPr sz="675"/>
+            <a:lvl7pPr marL="2743200" indent="0">
+              <a:buNone/>
+              <a:defRPr sz="1000"/>
             </a:lvl7pPr>
-            <a:lvl8pPr marL="2400300" indent="0">
-              <a:buNone/>
-              <a:defRPr sz="675"/>
+            <a:lvl8pPr marL="3200400" indent="0">
+              <a:buNone/>
+              <a:defRPr sz="1000"/>
             </a:lvl8pPr>
-            <a:lvl9pPr marL="2743200" indent="0">
-              <a:buNone/>
-              <a:defRPr sz="675"/>
+            <a:lvl9pPr marL="3657600" indent="0">
+              <a:buNone/>
+              <a:defRPr sz="1000"/>
             </a:lvl9pPr>
           </a:lstStyle>
           <a:p>
             <a:pPr lvl="0"/>
             <a:r>
-              <a:rPr lang="en-US"/>
+              <a:rPr lang="en-GB"/>
               <a:t>Click to edit Master text styles</a:t>
             </a:r>
           </a:p>
@@ -2534,11 +2425,11 @@
           <a:bodyPr/>
           <a:lstStyle/>
           <a:p>
-            <a:fld id="{241EB5C9-1307-BA42-ABA2-0BC069CD8E7F}" type="datetimeFigureOut">
-              <a:rPr lang="en-US" smtClean="0"/>
-              <a:t>1/2/22</a:t>
+            <a:fld id="{846CE7D5-CF57-46EF-B807-FDD0502418D4}" type="datetimeFigureOut">
+              <a:rPr lang="en-GB" smtClean="0"/>
+              <a:t>13/01/2026</a:t>
             </a:fld>
-            <a:endParaRPr lang="en-US"/>
+            <a:endParaRPr lang="en-GB"/>
           </a:p>
         </p:txBody>
       </p:sp>
@@ -2557,7 +2448,10 @@
           <a:bodyPr/>
           <a:lstStyle/>
           <a:p>
-            <a:endParaRPr lang="en-US"/>
+            <a:r>
+              <a:rPr lang="en-GB"/>
+              <a:t>Tâm Anh Oxford Partnership</a:t>
+            </a:r>
           </a:p>
         </p:txBody>
       </p:sp>
@@ -2576,24 +2470,25 @@
           <a:bodyPr/>
           <a:lstStyle/>
           <a:p>
-            <a:fld id="{C5EF2332-01BF-834F-8236-50238282D533}" type="slidenum">
-              <a:rPr lang="en-US" smtClean="0"/>
+            <a:fld id="{330EA680-D336-4FF7-8B7A-9848BB0A1C32}" type="slidenum">
+              <a:rPr lang="en-GB" smtClean="0"/>
               <a:t>‹#›</a:t>
             </a:fld>
-            <a:endParaRPr lang="en-US"/>
+            <a:endParaRPr lang="en-GB"/>
           </a:p>
         </p:txBody>
       </p:sp>
     </p:spTree>
     <p:extLst>
       <p:ext uri="{BB962C8B-B14F-4D97-AF65-F5344CB8AC3E}">
-        <p14:creationId xmlns:p14="http://schemas.microsoft.com/office/powerpoint/2010/main" val="3566899855"/>
+        <p14:creationId xmlns:p14="http://schemas.microsoft.com/office/powerpoint/2010/main" val="1718958274"/>
       </p:ext>
     </p:extLst>
   </p:cSld>
   <p:clrMapOvr>
     <a:masterClrMapping/>
   </p:clrMapOvr>
+  <p:hf hdr="0" dt="0"/>
 </p:sldLayout>
 </file>
 
@@ -2631,8 +2526,8 @@
         </p:nvSpPr>
         <p:spPr>
           <a:xfrm>
-            <a:off x="457200" y="205979"/>
-            <a:ext cx="8229600" cy="857250"/>
+            <a:off x="838200" y="365125"/>
+            <a:ext cx="10515600" cy="1325563"/>
           </a:xfrm>
           <a:prstGeom prst="rect">
             <a:avLst/>
@@ -2645,9 +2540,10 @@
           <a:lstStyle/>
           <a:p>
             <a:r>
-              <a:rPr lang="en-US"/>
+              <a:rPr lang="en-GB"/>
               <a:t>Click to edit Master title style</a:t>
             </a:r>
+            <a:endParaRPr dirty="0" lang="en-GB"/>
           </a:p>
         </p:txBody>
       </p:sp>
@@ -2663,8 +2559,8 @@
         </p:nvSpPr>
         <p:spPr>
           <a:xfrm>
-            <a:off x="457200" y="1200151"/>
-            <a:ext cx="8229600" cy="3394472"/>
+            <a:off x="838200" y="1825625"/>
+            <a:ext cx="10515600" cy="4351338"/>
           </a:xfrm>
           <a:prstGeom prst="rect">
             <a:avLst/>
@@ -2678,37 +2574,38 @@
           <a:p>
             <a:pPr lvl="0"/>
             <a:r>
-              <a:rPr lang="en-US"/>
+              <a:rPr lang="en-GB"/>
               <a:t>Click to edit Master text styles</a:t>
             </a:r>
           </a:p>
           <a:p>
             <a:pPr lvl="1"/>
             <a:r>
-              <a:rPr lang="en-US"/>
+              <a:rPr lang="en-GB"/>
               <a:t>Second level</a:t>
             </a:r>
           </a:p>
           <a:p>
             <a:pPr lvl="2"/>
             <a:r>
-              <a:rPr lang="en-US"/>
+              <a:rPr lang="en-GB"/>
               <a:t>Third level</a:t>
             </a:r>
           </a:p>
           <a:p>
             <a:pPr lvl="3"/>
             <a:r>
-              <a:rPr lang="en-US"/>
+              <a:rPr lang="en-GB"/>
               <a:t>Fourth level</a:t>
             </a:r>
           </a:p>
           <a:p>
             <a:pPr lvl="4"/>
             <a:r>
-              <a:rPr lang="en-US"/>
+              <a:rPr lang="en-GB"/>
               <a:t>Fifth level</a:t>
             </a:r>
+            <a:endParaRPr dirty="0" lang="en-GB"/>
           </a:p>
         </p:txBody>
       </p:sp>
@@ -2724,8 +2621,8 @@
         </p:nvSpPr>
         <p:spPr>
           <a:xfrm>
-            <a:off x="457200" y="4767263"/>
-            <a:ext cx="2133600" cy="273844"/>
+            <a:off x="838200" y="6356350"/>
+            <a:ext cx="2743200" cy="365125"/>
           </a:xfrm>
           <a:prstGeom prst="rect">
             <a:avLst/>
@@ -2735,21 +2632,21 @@
           <a:bodyPr anchor="ctr" bIns="45720" lIns="91440" rIns="91440" rtlCol="0" tIns="45720" vert="horz"/>
           <a:lstStyle>
             <a:lvl1pPr algn="l">
-              <a:defRPr sz="900">
+              <a:defRPr sz="1200">
                 <a:solidFill>
                   <a:schemeClr val="tx1">
-                    <a:tint val="75000"/>
+                    <a:tint val="82000"/>
                   </a:schemeClr>
                 </a:solidFill>
               </a:defRPr>
             </a:lvl1pPr>
           </a:lstStyle>
           <a:p>
-            <a:fld id="{241EB5C9-1307-BA42-ABA2-0BC069CD8E7F}" type="datetimeFigureOut">
-              <a:rPr lang="en-US" smtClean="0"/>
-              <a:t>1/2/22</a:t>
+            <a:fld id="{846CE7D5-CF57-46EF-B807-FDD0502418D4}" type="datetimeFigureOut">
+              <a:rPr lang="en-GB" smtClean="0"/>
+              <a:t>13/01/2026</a:t>
             </a:fld>
-            <a:endParaRPr lang="en-US"/>
+            <a:endParaRPr lang="en-GB"/>
           </a:p>
         </p:txBody>
       </p:sp>
@@ -2765,8 +2662,8 @@
         </p:nvSpPr>
         <p:spPr>
           <a:xfrm>
-            <a:off x="3124200" y="4767263"/>
-            <a:ext cx="2895600" cy="273844"/>
+            <a:off x="4038600" y="6356350"/>
+            <a:ext cx="4114800" cy="365125"/>
           </a:xfrm>
           <a:prstGeom prst="rect">
             <a:avLst/>
@@ -2776,17 +2673,20 @@
           <a:bodyPr anchor="ctr" bIns="45720" lIns="91440" rIns="91440" rtlCol="0" tIns="45720" vert="horz"/>
           <a:lstStyle>
             <a:lvl1pPr algn="ctr">
-              <a:defRPr sz="900">
+              <a:defRPr sz="1200">
                 <a:solidFill>
                   <a:schemeClr val="tx1">
-                    <a:tint val="75000"/>
+                    <a:tint val="82000"/>
                   </a:schemeClr>
                 </a:solidFill>
               </a:defRPr>
             </a:lvl1pPr>
           </a:lstStyle>
           <a:p>
-            <a:endParaRPr lang="en-US"/>
+            <a:r>
+              <a:rPr lang="en-GB"/>
+              <a:t>Tâm Anh Oxford Partnership</a:t>
+            </a:r>
           </a:p>
         </p:txBody>
       </p:sp>
@@ -2802,8 +2702,8 @@
         </p:nvSpPr>
         <p:spPr>
           <a:xfrm>
-            <a:off x="6553200" y="4767263"/>
-            <a:ext cx="2133600" cy="273844"/>
+            <a:off x="8610600" y="6356350"/>
+            <a:ext cx="2743200" cy="365125"/>
           </a:xfrm>
           <a:prstGeom prst="rect">
             <a:avLst/>
@@ -2813,53 +2713,57 @@
           <a:bodyPr anchor="ctr" bIns="45720" lIns="91440" rIns="91440" rtlCol="0" tIns="45720" vert="horz"/>
           <a:lstStyle>
             <a:lvl1pPr algn="r">
-              <a:defRPr sz="900">
+              <a:defRPr sz="1200">
                 <a:solidFill>
                   <a:schemeClr val="tx1">
-                    <a:tint val="75000"/>
+                    <a:tint val="82000"/>
                   </a:schemeClr>
                 </a:solidFill>
               </a:defRPr>
             </a:lvl1pPr>
           </a:lstStyle>
           <a:p>
-            <a:fld id="{C5EF2332-01BF-834F-8236-50238282D533}" type="slidenum">
-              <a:rPr lang="en-US" smtClean="0"/>
+            <a:fld id="{330EA680-D336-4FF7-8B7A-9848BB0A1C32}" type="slidenum">
+              <a:rPr lang="en-GB" smtClean="0"/>
               <a:t>‹#›</a:t>
             </a:fld>
-            <a:endParaRPr lang="en-US"/>
+            <a:endParaRPr lang="en-GB"/>
           </a:p>
         </p:txBody>
       </p:sp>
     </p:spTree>
     <p:extLst>
       <p:ext uri="{BB962C8B-B14F-4D97-AF65-F5344CB8AC3E}">
-        <p14:creationId xmlns:p14="http://schemas.microsoft.com/office/powerpoint/2010/main" val="3676200875"/>
+        <p14:creationId xmlns:p14="http://schemas.microsoft.com/office/powerpoint/2010/main" val="2460954070"/>
       </p:ext>
     </p:extLst>
   </p:cSld>
   <p:clrMap accent1="accent1" accent2="accent2" accent3="accent3" accent4="accent4" accent5="accent5" accent6="accent6" bg1="lt1" bg2="lt2" folHlink="folHlink" hlink="hlink" tx1="dk1" tx2="dk2"/>
   <p:sldLayoutIdLst>
-    <p:sldLayoutId id="2147483649" r:id="rId1"/>
-    <p:sldLayoutId id="2147483650" r:id="rId2"/>
-    <p:sldLayoutId id="2147483651" r:id="rId3"/>
-    <p:sldLayoutId id="2147483652" r:id="rId4"/>
-    <p:sldLayoutId id="2147483653" r:id="rId5"/>
-    <p:sldLayoutId id="2147483654" r:id="rId6"/>
-    <p:sldLayoutId id="2147483655" r:id="rId7"/>
-    <p:sldLayoutId id="2147483656" r:id="rId8"/>
-    <p:sldLayoutId id="2147483657" r:id="rId9"/>
-    <p:sldLayoutId id="2147483658" r:id="rId10"/>
-    <p:sldLayoutId id="2147483659" r:id="rId11"/>
+    <p:sldLayoutId id="2147483661" r:id="rId1"/>
+    <p:sldLayoutId id="2147483662" r:id="rId2"/>
+    <p:sldLayoutId id="2147483663" r:id="rId3"/>
+    <p:sldLayoutId id="2147483664" r:id="rId4"/>
+    <p:sldLayoutId id="2147483665" r:id="rId5"/>
+    <p:sldLayoutId id="2147483666" r:id="rId6"/>
+    <p:sldLayoutId id="2147483667" r:id="rId7"/>
+    <p:sldLayoutId id="2147483668" r:id="rId8"/>
+    <p:sldLayoutId id="2147483669" r:id="rId9"/>
+    <p:sldLayoutId id="2147483670" r:id="rId10"/>
+    <p:sldLayoutId id="2147483671" r:id="rId11"/>
   </p:sldLayoutIdLst>
+  <p:hf dt="0" hdr="0"/>
   <p:txStyles>
     <p:titleStyle>
-      <a:lvl1pPr algn="ctr" defTabSz="342900" eaLnBrk="1" hangingPunct="1" latinLnBrk="0" rtl="0">
+      <a:lvl1pPr algn="l" defTabSz="914400" eaLnBrk="1" hangingPunct="1" latinLnBrk="0" rtl="0">
+        <a:lnSpc>
+          <a:spcPct val="90000"/>
+        </a:lnSpc>
         <a:spcBef>
           <a:spcPct val="0"/>
         </a:spcBef>
         <a:buNone/>
-        <a:defRPr kern="1200" sz="3300">
+        <a:defRPr kern="1200" sz="4400">
           <a:solidFill>
             <a:schemeClr val="tx1"/>
           </a:solidFill>
@@ -2870,11 +2774,32 @@
       </a:lvl1pPr>
     </p:titleStyle>
     <p:bodyStyle>
-      <a:lvl1pPr algn="l" defTabSz="342900" eaLnBrk="1" hangingPunct="1" indent="-342900" latinLnBrk="0" marL="342900" rtl="0">
+      <a:lvl1pPr algn="l" defTabSz="914400" eaLnBrk="1" hangingPunct="1" indent="-228600" latinLnBrk="0" marL="228600" rtl="0">
+        <a:lnSpc>
+          <a:spcPct val="90000"/>
+        </a:lnSpc>
         <a:spcBef>
-          <a:spcPct val="20000"/>
+          <a:spcPts val="1000"/>
         </a:spcBef>
-        <a:buFont typeface="Arial"/>
+        <a:buFont charset="0" panose="020B0604020202020204" pitchFamily="34" typeface="Arial"/>
+        <a:buChar char="•"/>
+        <a:defRPr kern="1200" sz="2800">
+          <a:solidFill>
+            <a:schemeClr val="tx1"/>
+          </a:solidFill>
+          <a:latin typeface="+mn-lt"/>
+          <a:ea typeface="+mn-ea"/>
+          <a:cs typeface="+mn-cs"/>
+        </a:defRPr>
+      </a:lvl1pPr>
+      <a:lvl2pPr algn="l" defTabSz="914400" eaLnBrk="1" hangingPunct="1" indent="-228600" latinLnBrk="0" marL="685800" rtl="0">
+        <a:lnSpc>
+          <a:spcPct val="90000"/>
+        </a:lnSpc>
+        <a:spcBef>
+          <a:spcPts val="500"/>
+        </a:spcBef>
+        <a:buFont charset="0" panose="020B0604020202020204" pitchFamily="34" typeface="Arial"/>
         <a:buChar char="•"/>
         <a:defRPr kern="1200" sz="2400">
           <a:solidFill>
@@ -2884,14 +2809,17 @@
           <a:ea typeface="+mn-ea"/>
           <a:cs typeface="+mn-cs"/>
         </a:defRPr>
-      </a:lvl1pPr>
-      <a:lvl2pPr algn="l" defTabSz="342900" eaLnBrk="1" hangingPunct="1" indent="-342900" latinLnBrk="0" marL="685800" rtl="0">
+      </a:lvl2pPr>
+      <a:lvl3pPr algn="l" defTabSz="914400" eaLnBrk="1" hangingPunct="1" indent="-228600" latinLnBrk="0" marL="1143000" rtl="0">
+        <a:lnSpc>
+          <a:spcPct val="90000"/>
+        </a:lnSpc>
         <a:spcBef>
-          <a:spcPct val="20000"/>
+          <a:spcPts val="500"/>
         </a:spcBef>
-        <a:buFont typeface="Arial"/>
-        <a:buChar char="–"/>
-        <a:defRPr kern="1200" sz="2100">
+        <a:buFont charset="0" panose="020B0604020202020204" pitchFamily="34" typeface="Arial"/>
+        <a:buChar char="•"/>
+        <a:defRPr kern="1200" sz="2000">
           <a:solidFill>
             <a:schemeClr val="tx1"/>
           </a:solidFill>
@@ -2899,12 +2827,15 @@
           <a:ea typeface="+mn-ea"/>
           <a:cs typeface="+mn-cs"/>
         </a:defRPr>
-      </a:lvl2pPr>
-      <a:lvl3pPr algn="l" defTabSz="342900" eaLnBrk="1" hangingPunct="1" indent="-342900" latinLnBrk="0" marL="1028700" rtl="0">
+      </a:lvl3pPr>
+      <a:lvl4pPr algn="l" defTabSz="914400" eaLnBrk="1" hangingPunct="1" indent="-228600" latinLnBrk="0" marL="1600200" rtl="0">
+        <a:lnSpc>
+          <a:spcPct val="90000"/>
+        </a:lnSpc>
         <a:spcBef>
-          <a:spcPct val="20000"/>
+          <a:spcPts val="500"/>
         </a:spcBef>
-        <a:buFont typeface="Arial"/>
+        <a:buFont charset="0" panose="020B0604020202020204" pitchFamily="34" typeface="Arial"/>
         <a:buChar char="•"/>
         <a:defRPr kern="1200" sz="1800">
           <a:solidFill>
@@ -2914,29 +2845,17 @@
           <a:ea typeface="+mn-ea"/>
           <a:cs typeface="+mn-cs"/>
         </a:defRPr>
-      </a:lvl3pPr>
-      <a:lvl4pPr algn="l" defTabSz="342900" eaLnBrk="1" hangingPunct="1" indent="-342900" latinLnBrk="0" marL="1371600" rtl="0">
+      </a:lvl4pPr>
+      <a:lvl5pPr algn="l" defTabSz="914400" eaLnBrk="1" hangingPunct="1" indent="-228600" latinLnBrk="0" marL="2057400" rtl="0">
+        <a:lnSpc>
+          <a:spcPct val="90000"/>
+        </a:lnSpc>
         <a:spcBef>
-          <a:spcPct val="20000"/>
+          <a:spcPts val="500"/>
         </a:spcBef>
-        <a:buFont typeface="Arial"/>
-        <a:buChar char="–"/>
-        <a:defRPr kern="1200" sz="1500">
-          <a:solidFill>
-            <a:schemeClr val="tx1"/>
-          </a:solidFill>
-          <a:latin typeface="+mn-lt"/>
-          <a:ea typeface="+mn-ea"/>
-          <a:cs typeface="+mn-cs"/>
-        </a:defRPr>
-      </a:lvl4pPr>
-      <a:lvl5pPr algn="l" defTabSz="342900" eaLnBrk="1" hangingPunct="1" indent="-342900" latinLnBrk="0" marL="1714500" rtl="0">
-        <a:spcBef>
-          <a:spcPct val="20000"/>
-        </a:spcBef>
-        <a:buFont typeface="Arial"/>
-        <a:buChar char="»"/>
-        <a:defRPr kern="1200" sz="1500">
+        <a:buFont charset="0" panose="020B0604020202020204" pitchFamily="34" typeface="Arial"/>
+        <a:buChar char="•"/>
+        <a:defRPr kern="1200" sz="1800">
           <a:solidFill>
             <a:schemeClr val="tx1"/>
           </a:solidFill>
@@ -2945,13 +2864,16 @@
           <a:cs typeface="+mn-cs"/>
         </a:defRPr>
       </a:lvl5pPr>
-      <a:lvl6pPr algn="l" defTabSz="342900" eaLnBrk="1" hangingPunct="1" indent="-342900" latinLnBrk="0" marL="2057400" rtl="0">
+      <a:lvl6pPr algn="l" defTabSz="914400" eaLnBrk="1" hangingPunct="1" indent="-228600" latinLnBrk="0" marL="2514600" rtl="0">
+        <a:lnSpc>
+          <a:spcPct val="90000"/>
+        </a:lnSpc>
         <a:spcBef>
-          <a:spcPct val="20000"/>
+          <a:spcPts val="500"/>
         </a:spcBef>
-        <a:buFont typeface="Arial"/>
+        <a:buFont charset="0" panose="020B0604020202020204" pitchFamily="34" typeface="Arial"/>
         <a:buChar char="•"/>
-        <a:defRPr kern="1200" sz="1500">
+        <a:defRPr kern="1200" sz="1800">
           <a:solidFill>
             <a:schemeClr val="tx1"/>
           </a:solidFill>
@@ -2960,13 +2882,16 @@
           <a:cs typeface="+mn-cs"/>
         </a:defRPr>
       </a:lvl6pPr>
-      <a:lvl7pPr algn="l" defTabSz="342900" eaLnBrk="1" hangingPunct="1" indent="-342900" latinLnBrk="0" marL="2400300" rtl="0">
+      <a:lvl7pPr algn="l" defTabSz="914400" eaLnBrk="1" hangingPunct="1" indent="-228600" latinLnBrk="0" marL="2971800" rtl="0">
+        <a:lnSpc>
+          <a:spcPct val="90000"/>
+        </a:lnSpc>
         <a:spcBef>
-          <a:spcPct val="20000"/>
+          <a:spcPts val="500"/>
         </a:spcBef>
-        <a:buFont typeface="Arial"/>
+        <a:buFont charset="0" panose="020B0604020202020204" pitchFamily="34" typeface="Arial"/>
         <a:buChar char="•"/>
-        <a:defRPr kern="1200" sz="1500">
+        <a:defRPr kern="1200" sz="1800">
           <a:solidFill>
             <a:schemeClr val="tx1"/>
           </a:solidFill>
@@ -2975,13 +2900,16 @@
           <a:cs typeface="+mn-cs"/>
         </a:defRPr>
       </a:lvl7pPr>
-      <a:lvl8pPr algn="l" defTabSz="342900" eaLnBrk="1" hangingPunct="1" indent="-342900" latinLnBrk="0" marL="2743200" rtl="0">
+      <a:lvl8pPr algn="l" defTabSz="914400" eaLnBrk="1" hangingPunct="1" indent="-228600" latinLnBrk="0" marL="3429000" rtl="0">
+        <a:lnSpc>
+          <a:spcPct val="90000"/>
+        </a:lnSpc>
         <a:spcBef>
-          <a:spcPct val="20000"/>
+          <a:spcPts val="500"/>
         </a:spcBef>
-        <a:buFont typeface="Arial"/>
+        <a:buFont charset="0" panose="020B0604020202020204" pitchFamily="34" typeface="Arial"/>
         <a:buChar char="•"/>
-        <a:defRPr kern="1200" sz="1500">
+        <a:defRPr kern="1200" sz="1800">
           <a:solidFill>
             <a:schemeClr val="tx1"/>
           </a:solidFill>
@@ -2990,13 +2918,16 @@
           <a:cs typeface="+mn-cs"/>
         </a:defRPr>
       </a:lvl8pPr>
-      <a:lvl9pPr algn="l" defTabSz="342900" eaLnBrk="1" hangingPunct="1" indent="-342900" latinLnBrk="0" marL="3086100" rtl="0">
+      <a:lvl9pPr algn="l" defTabSz="914400" eaLnBrk="1" hangingPunct="1" indent="-228600" latinLnBrk="0" marL="3886200" rtl="0">
+        <a:lnSpc>
+          <a:spcPct val="90000"/>
+        </a:lnSpc>
         <a:spcBef>
-          <a:spcPct val="20000"/>
+          <a:spcPts val="500"/>
         </a:spcBef>
-        <a:buFont typeface="Arial"/>
+        <a:buFont charset="0" panose="020B0604020202020204" pitchFamily="34" typeface="Arial"/>
         <a:buChar char="•"/>
-        <a:defRPr kern="1200" sz="1500">
+        <a:defRPr kern="1200" sz="1800">
           <a:solidFill>
             <a:schemeClr val="tx1"/>
           </a:solidFill>
@@ -3008,10 +2939,10 @@
     </p:bodyStyle>
     <p:otherStyle>
       <a:defPPr>
-        <a:defRPr lang="en-US"/>
+        <a:defRPr lang="en-GB"/>
       </a:defPPr>
-      <a:lvl1pPr algn="l" defTabSz="342900" eaLnBrk="1" hangingPunct="1" latinLnBrk="0" marL="0" rtl="0">
-        <a:defRPr kern="1200" sz="1350">
+      <a:lvl1pPr algn="l" defTabSz="914400" eaLnBrk="1" hangingPunct="1" latinLnBrk="0" marL="0" rtl="0">
+        <a:defRPr kern="1200" sz="1800">
           <a:solidFill>
             <a:schemeClr val="tx1"/>
           </a:solidFill>
@@ -3020,8 +2951,8 @@
           <a:cs typeface="+mn-cs"/>
         </a:defRPr>
       </a:lvl1pPr>
-      <a:lvl2pPr algn="l" defTabSz="342900" eaLnBrk="1" hangingPunct="1" latinLnBrk="0" marL="342900" rtl="0">
-        <a:defRPr kern="1200" sz="1350">
+      <a:lvl2pPr algn="l" defTabSz="914400" eaLnBrk="1" hangingPunct="1" latinLnBrk="0" marL="457200" rtl="0">
+        <a:defRPr kern="1200" sz="1800">
           <a:solidFill>
             <a:schemeClr val="tx1"/>
           </a:solidFill>
@@ -3030,8 +2961,8 @@
           <a:cs typeface="+mn-cs"/>
         </a:defRPr>
       </a:lvl2pPr>
-      <a:lvl3pPr algn="l" defTabSz="342900" eaLnBrk="1" hangingPunct="1" latinLnBrk="0" marL="685800" rtl="0">
-        <a:defRPr kern="1200" sz="1350">
+      <a:lvl3pPr algn="l" defTabSz="914400" eaLnBrk="1" hangingPunct="1" latinLnBrk="0" marL="914400" rtl="0">
+        <a:defRPr kern="1200" sz="1800">
           <a:solidFill>
             <a:schemeClr val="tx1"/>
           </a:solidFill>
@@ -3040,8 +2971,8 @@
           <a:cs typeface="+mn-cs"/>
         </a:defRPr>
       </a:lvl3pPr>
-      <a:lvl4pPr algn="l" defTabSz="342900" eaLnBrk="1" hangingPunct="1" latinLnBrk="0" marL="1028700" rtl="0">
-        <a:defRPr kern="1200" sz="1350">
+      <a:lvl4pPr algn="l" defTabSz="914400" eaLnBrk="1" hangingPunct="1" latinLnBrk="0" marL="1371600" rtl="0">
+        <a:defRPr kern="1200" sz="1800">
           <a:solidFill>
             <a:schemeClr val="tx1"/>
           </a:solidFill>
@@ -3050,8 +2981,8 @@
           <a:cs typeface="+mn-cs"/>
         </a:defRPr>
       </a:lvl4pPr>
-      <a:lvl5pPr algn="l" defTabSz="342900" eaLnBrk="1" hangingPunct="1" latinLnBrk="0" marL="1371600" rtl="0">
-        <a:defRPr kern="1200" sz="1350">
+      <a:lvl5pPr algn="l" defTabSz="914400" eaLnBrk="1" hangingPunct="1" latinLnBrk="0" marL="1828800" rtl="0">
+        <a:defRPr kern="1200" sz="1800">
           <a:solidFill>
             <a:schemeClr val="tx1"/>
           </a:solidFill>
@@ -3060,8 +2991,8 @@
           <a:cs typeface="+mn-cs"/>
         </a:defRPr>
       </a:lvl5pPr>
-      <a:lvl6pPr algn="l" defTabSz="342900" eaLnBrk="1" hangingPunct="1" latinLnBrk="0" marL="1714500" rtl="0">
-        <a:defRPr kern="1200" sz="1350">
+      <a:lvl6pPr algn="l" defTabSz="914400" eaLnBrk="1" hangingPunct="1" latinLnBrk="0" marL="2286000" rtl="0">
+        <a:defRPr kern="1200" sz="1800">
           <a:solidFill>
             <a:schemeClr val="tx1"/>
           </a:solidFill>
@@ -3070,8 +3001,8 @@
           <a:cs typeface="+mn-cs"/>
         </a:defRPr>
       </a:lvl6pPr>
-      <a:lvl7pPr algn="l" defTabSz="342900" eaLnBrk="1" hangingPunct="1" latinLnBrk="0" marL="2057400" rtl="0">
-        <a:defRPr kern="1200" sz="1350">
+      <a:lvl7pPr algn="l" defTabSz="914400" eaLnBrk="1" hangingPunct="1" latinLnBrk="0" marL="2743200" rtl="0">
+        <a:defRPr kern="1200" sz="1800">
           <a:solidFill>
             <a:schemeClr val="tx1"/>
           </a:solidFill>
@@ -3080,8 +3011,8 @@
           <a:cs typeface="+mn-cs"/>
         </a:defRPr>
       </a:lvl7pPr>
-      <a:lvl8pPr algn="l" defTabSz="342900" eaLnBrk="1" hangingPunct="1" latinLnBrk="0" marL="2400300" rtl="0">
-        <a:defRPr kern="1200" sz="1350">
+      <a:lvl8pPr algn="l" defTabSz="914400" eaLnBrk="1" hangingPunct="1" latinLnBrk="0" marL="3200400" rtl="0">
+        <a:defRPr kern="1200" sz="1800">
           <a:solidFill>
             <a:schemeClr val="tx1"/>
           </a:solidFill>
@@ -3090,8 +3021,8 @@
           <a:cs typeface="+mn-cs"/>
         </a:defRPr>
       </a:lvl8pPr>
-      <a:lvl9pPr algn="l" defTabSz="342900" eaLnBrk="1" hangingPunct="1" latinLnBrk="0" marL="2743200" rtl="0">
-        <a:defRPr kern="1200" sz="1350">
+      <a:lvl9pPr algn="l" defTabSz="914400" eaLnBrk="1" hangingPunct="1" latinLnBrk="0" marL="3657600" rtl="0">
+        <a:defRPr kern="1200" sz="1800">
           <a:solidFill>
             <a:schemeClr val="tx1"/>
           </a:solidFill>
@@ -3134,8 +3065,8 @@
         </p:nvSpPr>
         <p:spPr>
           <a:xfrm>
-            <a:off x="685800" y="1597819"/>
-            <a:ext cx="7772400" cy="1102519"/>
+            <a:off x="1524000" y="1122363"/>
+            <a:ext cx="9144000" cy="2387600"/>
           </a:xfrm>
         </p:spPr>
         <p:txBody>
@@ -3164,8 +3095,8 @@
         </p:nvSpPr>
         <p:spPr>
           <a:xfrm>
-            <a:off x="1371600" y="2914650"/>
-            <a:ext cx="6400800" cy="1314450"/>
+            <a:off x="1524000" y="3602038"/>
+            <a:ext cx="9144000" cy="1655762"/>
           </a:xfrm>
         </p:spPr>
         <p:txBody>
@@ -3251,8 +3182,8 @@
         </p:blipFill>
         <p:spPr bwMode="auto">
           <a:xfrm>
-            <a:off x="2870200" y="1193800"/>
-            <a:ext cx="3390900" cy="3390900"/>
+            <a:off x="3924300" y="1816100"/>
+            <a:ext cx="4343400" cy="4343400"/>
           </a:xfrm>
           <a:prstGeom prst="rect">
             <a:avLst/>
@@ -3265,6 +3196,51 @@
           </a:ln>
         </p:spPr>
       </p:pic>
+      <p:sp>
+        <p:nvSpPr>
+          <p:cNvPr id="5" name="Footer Placeholder 4"/>
+          <p:cNvSpPr>
+            <a:spLocks noGrp="1"/>
+          </p:cNvSpPr>
+          <p:nvPr>
+            <p:ph idx="11" sz="quarter" type="ftr"/>
+          </p:nvPr>
+        </p:nvSpPr>
+        <p:spPr/>
+        <p:txBody>
+          <a:bodyPr/>
+          <a:lstStyle/>
+          <a:p>
+            <a:r>
+              <a:rPr lang="en-GB"/>
+              <a:t>Tâm Anh Oxford Partnership</a:t>
+            </a:r>
+          </a:p>
+        </p:txBody>
+      </p:sp>
+      <p:sp>
+        <p:nvSpPr>
+          <p:cNvPr id="6" name="Slide Number Placeholder 5"/>
+          <p:cNvSpPr>
+            <a:spLocks noGrp="1"/>
+          </p:cNvSpPr>
+          <p:nvPr>
+            <p:ph idx="12" sz="quarter" type="sldNum"/>
+          </p:nvPr>
+        </p:nvSpPr>
+        <p:spPr/>
+        <p:txBody>
+          <a:bodyPr/>
+          <a:lstStyle/>
+          <a:p>
+            <a:fld id="{330EA680-D336-4FF7-8B7A-9848BB0A1C32}" type="slidenum">
+              <a:rPr lang="en-GB" smtClean="0"/>
+              <a:t>‹#›</a:t>
+            </a:fld>
+            <a:endParaRPr lang="en-GB"/>
+          </a:p>
+        </p:txBody>
+      </p:sp>
     </p:spTree>
   </p:cSld>
 </p:sld>
@@ -3312,6 +3288,51 @@
           </a:p>
         </p:txBody>
       </p:sp>
+      <p:sp>
+        <p:nvSpPr>
+          <p:cNvPr id="5" name="Footer Placeholder 4"/>
+          <p:cNvSpPr>
+            <a:spLocks noGrp="1"/>
+          </p:cNvSpPr>
+          <p:nvPr>
+            <p:ph idx="11" sz="quarter" type="ftr"/>
+          </p:nvPr>
+        </p:nvSpPr>
+        <p:spPr/>
+        <p:txBody>
+          <a:bodyPr/>
+          <a:lstStyle/>
+          <a:p>
+            <a:r>
+              <a:rPr lang="en-GB"/>
+              <a:t>Tâm Anh Oxford Partnership</a:t>
+            </a:r>
+          </a:p>
+        </p:txBody>
+      </p:sp>
+      <p:sp>
+        <p:nvSpPr>
+          <p:cNvPr id="6" name="Slide Number Placeholder 5"/>
+          <p:cNvSpPr>
+            <a:spLocks noGrp="1"/>
+          </p:cNvSpPr>
+          <p:nvPr>
+            <p:ph idx="12" sz="quarter" type="sldNum"/>
+          </p:nvPr>
+        </p:nvSpPr>
+        <p:spPr/>
+        <p:txBody>
+          <a:bodyPr/>
+          <a:lstStyle/>
+          <a:p>
+            <a:fld id="{330EA680-D336-4FF7-8B7A-9848BB0A1C32}" type="slidenum">
+              <a:rPr lang="en-GB" smtClean="0"/>
+              <a:t>‹#›</a:t>
+            </a:fld>
+            <a:endParaRPr lang="en-GB"/>
+          </a:p>
+        </p:txBody>
+      </p:sp>
     </p:spTree>
   </p:cSld>
 </p:sld>
@@ -3359,6 +3380,51 @@
           </a:p>
         </p:txBody>
       </p:sp>
+      <p:sp>
+        <p:nvSpPr>
+          <p:cNvPr id="5" name="Footer Placeholder 4"/>
+          <p:cNvSpPr>
+            <a:spLocks noGrp="1"/>
+          </p:cNvSpPr>
+          <p:nvPr>
+            <p:ph idx="11" sz="quarter" type="ftr"/>
+          </p:nvPr>
+        </p:nvSpPr>
+        <p:spPr/>
+        <p:txBody>
+          <a:bodyPr/>
+          <a:lstStyle/>
+          <a:p>
+            <a:r>
+              <a:rPr lang="en-GB"/>
+              <a:t>Tâm Anh Oxford Partnership</a:t>
+            </a:r>
+          </a:p>
+        </p:txBody>
+      </p:sp>
+      <p:sp>
+        <p:nvSpPr>
+          <p:cNvPr id="6" name="Slide Number Placeholder 5"/>
+          <p:cNvSpPr>
+            <a:spLocks noGrp="1"/>
+          </p:cNvSpPr>
+          <p:nvPr>
+            <p:ph idx="12" sz="quarter" type="sldNum"/>
+          </p:nvPr>
+        </p:nvSpPr>
+        <p:spPr/>
+        <p:txBody>
+          <a:bodyPr/>
+          <a:lstStyle/>
+          <a:p>
+            <a:fld id="{330EA680-D336-4FF7-8B7A-9848BB0A1C32}" type="slidenum">
+              <a:rPr lang="en-GB" smtClean="0"/>
+              <a:t>‹#›</a:t>
+            </a:fld>
+            <a:endParaRPr lang="en-GB"/>
+          </a:p>
+        </p:txBody>
+      </p:sp>
     </p:spTree>
   </p:cSld>
 </p:sld>
@@ -3444,6 +3510,51 @@
           </a:p>
         </p:txBody>
       </p:sp>
+      <p:sp>
+        <p:nvSpPr>
+          <p:cNvPr id="5" name="Footer Placeholder 4"/>
+          <p:cNvSpPr>
+            <a:spLocks noGrp="1"/>
+          </p:cNvSpPr>
+          <p:nvPr>
+            <p:ph idx="11" sz="quarter" type="ftr"/>
+          </p:nvPr>
+        </p:nvSpPr>
+        <p:spPr/>
+        <p:txBody>
+          <a:bodyPr/>
+          <a:lstStyle/>
+          <a:p>
+            <a:r>
+              <a:rPr lang="en-GB"/>
+              <a:t>Tâm Anh Oxford Partnership</a:t>
+            </a:r>
+          </a:p>
+        </p:txBody>
+      </p:sp>
+      <p:sp>
+        <p:nvSpPr>
+          <p:cNvPr id="6" name="Slide Number Placeholder 5"/>
+          <p:cNvSpPr>
+            <a:spLocks noGrp="1"/>
+          </p:cNvSpPr>
+          <p:nvPr>
+            <p:ph idx="12" sz="quarter" type="sldNum"/>
+          </p:nvPr>
+        </p:nvSpPr>
+        <p:spPr/>
+        <p:txBody>
+          <a:bodyPr/>
+          <a:lstStyle/>
+          <a:p>
+            <a:fld id="{330EA680-D336-4FF7-8B7A-9848BB0A1C32}" type="slidenum">
+              <a:rPr lang="en-GB" smtClean="0"/>
+              <a:t>‹#›</a:t>
+            </a:fld>
+            <a:endParaRPr lang="en-GB"/>
+          </a:p>
+        </p:txBody>
+      </p:sp>
     </p:spTree>
   </p:cSld>
 </p:sld>
@@ -3537,6 +3648,51 @@
               <a:rPr/>
               <a:t>Chi phí sản phẩm được công khai một cách minh bạch nhất có thể để đảm bảo trách nhiệm giải trình với người nộp thuế và công dân.</a:t>
             </a:r>
+          </a:p>
+        </p:txBody>
+      </p:sp>
+      <p:sp>
+        <p:nvSpPr>
+          <p:cNvPr id="6" name="Footer Placeholder 5"/>
+          <p:cNvSpPr>
+            <a:spLocks noGrp="1"/>
+          </p:cNvSpPr>
+          <p:nvPr>
+            <p:ph idx="11" sz="quarter" type="ftr"/>
+          </p:nvPr>
+        </p:nvSpPr>
+        <p:spPr/>
+        <p:txBody>
+          <a:bodyPr/>
+          <a:lstStyle/>
+          <a:p>
+            <a:r>
+              <a:rPr lang="en-GB"/>
+              <a:t>Tâm Anh Oxford Partnership</a:t>
+            </a:r>
+          </a:p>
+        </p:txBody>
+      </p:sp>
+      <p:sp>
+        <p:nvSpPr>
+          <p:cNvPr id="7" name="Slide Number Placeholder 6"/>
+          <p:cNvSpPr>
+            <a:spLocks noGrp="1"/>
+          </p:cNvSpPr>
+          <p:nvPr>
+            <p:ph idx="12" sz="quarter" type="sldNum"/>
+          </p:nvPr>
+        </p:nvSpPr>
+        <p:spPr/>
+        <p:txBody>
+          <a:bodyPr/>
+          <a:lstStyle/>
+          <a:p>
+            <a:fld id="{330EA680-D336-4FF7-8B7A-9848BB0A1C32}" type="slidenum">
+              <a:rPr lang="en-GB" smtClean="0"/>
+              <a:t>‹#›</a:t>
+            </a:fld>
+            <a:endParaRPr lang="en-GB"/>
           </a:p>
         </p:txBody>
       </p:sp>
@@ -3578,8 +3734,8 @@
         </p:blipFill>
         <p:spPr bwMode="auto">
           <a:xfrm>
-            <a:off x="457200" y="1943100"/>
-            <a:ext cx="8229600" cy="1892300"/>
+            <a:off x="838200" y="2781300"/>
+            <a:ext cx="10515600" cy="2413000"/>
           </a:xfrm>
           <a:prstGeom prst="rect">
             <a:avLst/>
@@ -3592,6 +3748,51 @@
           </a:ln>
         </p:spPr>
       </p:pic>
+      <p:sp>
+        <p:nvSpPr>
+          <p:cNvPr id="5" name="Footer Placeholder 4"/>
+          <p:cNvSpPr>
+            <a:spLocks noGrp="1"/>
+          </p:cNvSpPr>
+          <p:nvPr>
+            <p:ph idx="11" sz="quarter" type="ftr"/>
+          </p:nvPr>
+        </p:nvSpPr>
+        <p:spPr/>
+        <p:txBody>
+          <a:bodyPr/>
+          <a:lstStyle/>
+          <a:p>
+            <a:r>
+              <a:rPr lang="en-GB"/>
+              <a:t>Tâm Anh Oxford Partnership</a:t>
+            </a:r>
+          </a:p>
+        </p:txBody>
+      </p:sp>
+      <p:sp>
+        <p:nvSpPr>
+          <p:cNvPr id="6" name="Slide Number Placeholder 5"/>
+          <p:cNvSpPr>
+            <a:spLocks noGrp="1"/>
+          </p:cNvSpPr>
+          <p:nvPr>
+            <p:ph idx="12" sz="quarter" type="sldNum"/>
+          </p:nvPr>
+        </p:nvSpPr>
+        <p:spPr/>
+        <p:txBody>
+          <a:bodyPr/>
+          <a:lstStyle/>
+          <a:p>
+            <a:fld id="{330EA680-D336-4FF7-8B7A-9848BB0A1C32}" type="slidenum">
+              <a:rPr lang="en-GB" smtClean="0"/>
+              <a:t>‹#›</a:t>
+            </a:fld>
+            <a:endParaRPr lang="en-GB"/>
+          </a:p>
+        </p:txBody>
+      </p:sp>
     </p:spTree>
   </p:cSld>
 </p:sld>
@@ -3647,6 +3848,51 @@
               <a:rPr/>
               <a:t>Các vụ lừa đảo được báo cáo sẽ được cơ quan chức năng xác minh, giúp họ theo dõi và phản ứng với các biến thể lừa đảo mới.</a:t>
             </a:r>
+          </a:p>
+        </p:txBody>
+      </p:sp>
+      <p:sp>
+        <p:nvSpPr>
+          <p:cNvPr id="5" name="Footer Placeholder 4"/>
+          <p:cNvSpPr>
+            <a:spLocks noGrp="1"/>
+          </p:cNvSpPr>
+          <p:nvPr>
+            <p:ph idx="11" sz="quarter" type="ftr"/>
+          </p:nvPr>
+        </p:nvSpPr>
+        <p:spPr/>
+        <p:txBody>
+          <a:bodyPr/>
+          <a:lstStyle/>
+          <a:p>
+            <a:r>
+              <a:rPr lang="en-GB"/>
+              <a:t>Tâm Anh Oxford Partnership</a:t>
+            </a:r>
+          </a:p>
+        </p:txBody>
+      </p:sp>
+      <p:sp>
+        <p:nvSpPr>
+          <p:cNvPr id="6" name="Slide Number Placeholder 5"/>
+          <p:cNvSpPr>
+            <a:spLocks noGrp="1"/>
+          </p:cNvSpPr>
+          <p:nvPr>
+            <p:ph idx="12" sz="quarter" type="sldNum"/>
+          </p:nvPr>
+        </p:nvSpPr>
+        <p:spPr/>
+        <p:txBody>
+          <a:bodyPr/>
+          <a:lstStyle/>
+          <a:p>
+            <a:fld id="{330EA680-D336-4FF7-8B7A-9848BB0A1C32}" type="slidenum">
+              <a:rPr lang="en-GB" smtClean="0"/>
+              <a:t>‹#›</a:t>
+            </a:fld>
+            <a:endParaRPr lang="en-GB"/>
           </a:p>
         </p:txBody>
       </p:sp>
@@ -3688,8 +3934,8 @@
         </p:blipFill>
         <p:spPr bwMode="auto">
           <a:xfrm>
-            <a:off x="457200" y="2120900"/>
-            <a:ext cx="8229600" cy="1549400"/>
+            <a:off x="838200" y="2997200"/>
+            <a:ext cx="10515600" cy="1968500"/>
           </a:xfrm>
           <a:prstGeom prst="rect">
             <a:avLst/>
@@ -3702,6 +3948,51 @@
           </a:ln>
         </p:spPr>
       </p:pic>
+      <p:sp>
+        <p:nvSpPr>
+          <p:cNvPr id="5" name="Footer Placeholder 4"/>
+          <p:cNvSpPr>
+            <a:spLocks noGrp="1"/>
+          </p:cNvSpPr>
+          <p:nvPr>
+            <p:ph idx="11" sz="quarter" type="ftr"/>
+          </p:nvPr>
+        </p:nvSpPr>
+        <p:spPr/>
+        <p:txBody>
+          <a:bodyPr/>
+          <a:lstStyle/>
+          <a:p>
+            <a:r>
+              <a:rPr lang="en-GB"/>
+              <a:t>Tâm Anh Oxford Partnership</a:t>
+            </a:r>
+          </a:p>
+        </p:txBody>
+      </p:sp>
+      <p:sp>
+        <p:nvSpPr>
+          <p:cNvPr id="6" name="Slide Number Placeholder 5"/>
+          <p:cNvSpPr>
+            <a:spLocks noGrp="1"/>
+          </p:cNvSpPr>
+          <p:nvPr>
+            <p:ph idx="12" sz="quarter" type="sldNum"/>
+          </p:nvPr>
+        </p:nvSpPr>
+        <p:spPr/>
+        <p:txBody>
+          <a:bodyPr/>
+          <a:lstStyle/>
+          <a:p>
+            <a:fld id="{330EA680-D336-4FF7-8B7A-9848BB0A1C32}" type="slidenum">
+              <a:rPr lang="en-GB" smtClean="0"/>
+              <a:t>‹#›</a:t>
+            </a:fld>
+            <a:endParaRPr lang="en-GB"/>
+          </a:p>
+        </p:txBody>
+      </p:sp>
     </p:spTree>
   </p:cSld>
 </p:sld>
@@ -3778,6 +4069,51 @@
               <a:rPr/>
               <a:t>Công dân có thể đổi phiếu giảm giá và các doanh nghiệp có thể chấp nhận chúng thông qua cùng một hệ thống.</a:t>
             </a:r>
+          </a:p>
+        </p:txBody>
+      </p:sp>
+      <p:sp>
+        <p:nvSpPr>
+          <p:cNvPr id="5" name="Footer Placeholder 4"/>
+          <p:cNvSpPr>
+            <a:spLocks noGrp="1"/>
+          </p:cNvSpPr>
+          <p:nvPr>
+            <p:ph idx="11" sz="quarter" type="ftr"/>
+          </p:nvPr>
+        </p:nvSpPr>
+        <p:spPr/>
+        <p:txBody>
+          <a:bodyPr/>
+          <a:lstStyle/>
+          <a:p>
+            <a:r>
+              <a:rPr lang="en-GB"/>
+              <a:t>Tâm Anh Oxford Partnership</a:t>
+            </a:r>
+          </a:p>
+        </p:txBody>
+      </p:sp>
+      <p:sp>
+        <p:nvSpPr>
+          <p:cNvPr id="6" name="Slide Number Placeholder 5"/>
+          <p:cNvSpPr>
+            <a:spLocks noGrp="1"/>
+          </p:cNvSpPr>
+          <p:nvPr>
+            <p:ph idx="12" sz="quarter" type="sldNum"/>
+          </p:nvPr>
+        </p:nvSpPr>
+        <p:spPr/>
+        <p:txBody>
+          <a:bodyPr/>
+          <a:lstStyle/>
+          <a:p>
+            <a:fld id="{330EA680-D336-4FF7-8B7A-9848BB0A1C32}" type="slidenum">
+              <a:rPr lang="en-GB" smtClean="0"/>
+              <a:t>‹#›</a:t>
+            </a:fld>
+            <a:endParaRPr lang="en-GB"/>
           </a:p>
         </p:txBody>
       </p:sp>
@@ -3819,8 +4155,8 @@
         </p:blipFill>
         <p:spPr bwMode="auto">
           <a:xfrm>
-            <a:off x="457200" y="1955800"/>
-            <a:ext cx="8229600" cy="1879600"/>
+            <a:off x="838200" y="2794000"/>
+            <a:ext cx="10515600" cy="2400300"/>
           </a:xfrm>
           <a:prstGeom prst="rect">
             <a:avLst/>
@@ -3833,6 +4169,51 @@
           </a:ln>
         </p:spPr>
       </p:pic>
+      <p:sp>
+        <p:nvSpPr>
+          <p:cNvPr id="5" name="Footer Placeholder 4"/>
+          <p:cNvSpPr>
+            <a:spLocks noGrp="1"/>
+          </p:cNvSpPr>
+          <p:nvPr>
+            <p:ph idx="11" sz="quarter" type="ftr"/>
+          </p:nvPr>
+        </p:nvSpPr>
+        <p:spPr/>
+        <p:txBody>
+          <a:bodyPr/>
+          <a:lstStyle/>
+          <a:p>
+            <a:r>
+              <a:rPr lang="en-GB"/>
+              <a:t>Tâm Anh Oxford Partnership</a:t>
+            </a:r>
+          </a:p>
+        </p:txBody>
+      </p:sp>
+      <p:sp>
+        <p:nvSpPr>
+          <p:cNvPr id="6" name="Slide Number Placeholder 5"/>
+          <p:cNvSpPr>
+            <a:spLocks noGrp="1"/>
+          </p:cNvSpPr>
+          <p:nvPr>
+            <p:ph idx="12" sz="quarter" type="sldNum"/>
+          </p:nvPr>
+        </p:nvSpPr>
+        <p:spPr/>
+        <p:txBody>
+          <a:bodyPr/>
+          <a:lstStyle/>
+          <a:p>
+            <a:fld id="{330EA680-D336-4FF7-8B7A-9848BB0A1C32}" type="slidenum">
+              <a:rPr lang="en-GB" smtClean="0"/>
+              <a:t>‹#›</a:t>
+            </a:fld>
+            <a:endParaRPr lang="en-GB"/>
+          </a:p>
+        </p:txBody>
+      </p:sp>
     </p:spTree>
   </p:cSld>
 </p:sld>
@@ -3871,8 +4252,8 @@
         </p:blipFill>
         <p:spPr bwMode="auto">
           <a:xfrm>
-            <a:off x="800100" y="1193800"/>
-            <a:ext cx="7543800" cy="3390900"/>
+            <a:off x="1270000" y="1816100"/>
+            <a:ext cx="9652000" cy="4343400"/>
           </a:xfrm>
           <a:prstGeom prst="rect">
             <a:avLst/>
@@ -3885,6 +4266,51 @@
           </a:ln>
         </p:spPr>
       </p:pic>
+      <p:sp>
+        <p:nvSpPr>
+          <p:cNvPr id="5" name="Footer Placeholder 4"/>
+          <p:cNvSpPr>
+            <a:spLocks noGrp="1"/>
+          </p:cNvSpPr>
+          <p:nvPr>
+            <p:ph idx="11" sz="quarter" type="ftr"/>
+          </p:nvPr>
+        </p:nvSpPr>
+        <p:spPr/>
+        <p:txBody>
+          <a:bodyPr/>
+          <a:lstStyle/>
+          <a:p>
+            <a:r>
+              <a:rPr lang="en-GB"/>
+              <a:t>Tâm Anh Oxford Partnership</a:t>
+            </a:r>
+          </a:p>
+        </p:txBody>
+      </p:sp>
+      <p:sp>
+        <p:nvSpPr>
+          <p:cNvPr id="6" name="Slide Number Placeholder 5"/>
+          <p:cNvSpPr>
+            <a:spLocks noGrp="1"/>
+          </p:cNvSpPr>
+          <p:nvPr>
+            <p:ph idx="12" sz="quarter" type="sldNum"/>
+          </p:nvPr>
+        </p:nvSpPr>
+        <p:spPr/>
+        <p:txBody>
+          <a:bodyPr/>
+          <a:lstStyle/>
+          <a:p>
+            <a:fld id="{330EA680-D336-4FF7-8B7A-9848BB0A1C32}" type="slidenum">
+              <a:rPr lang="en-GB" smtClean="0"/>
+              <a:t>‹#›</a:t>
+            </a:fld>
+            <a:endParaRPr lang="en-GB"/>
+          </a:p>
+        </p:txBody>
+      </p:sp>
     </p:spTree>
   </p:cSld>
 </p:sld>
@@ -3957,6 +4383,51 @@
           </a:p>
         </p:txBody>
       </p:sp>
+      <p:sp>
+        <p:nvSpPr>
+          <p:cNvPr id="5" name="Footer Placeholder 4"/>
+          <p:cNvSpPr>
+            <a:spLocks noGrp="1"/>
+          </p:cNvSpPr>
+          <p:nvPr>
+            <p:ph idx="11" sz="quarter" type="ftr"/>
+          </p:nvPr>
+        </p:nvSpPr>
+        <p:spPr/>
+        <p:txBody>
+          <a:bodyPr/>
+          <a:lstStyle/>
+          <a:p>
+            <a:r>
+              <a:rPr lang="en-GB"/>
+              <a:t>Tâm Anh Oxford Partnership</a:t>
+            </a:r>
+          </a:p>
+        </p:txBody>
+      </p:sp>
+      <p:sp>
+        <p:nvSpPr>
+          <p:cNvPr id="6" name="Slide Number Placeholder 5"/>
+          <p:cNvSpPr>
+            <a:spLocks noGrp="1"/>
+          </p:cNvSpPr>
+          <p:nvPr>
+            <p:ph idx="12" sz="quarter" type="sldNum"/>
+          </p:nvPr>
+        </p:nvSpPr>
+        <p:spPr/>
+        <p:txBody>
+          <a:bodyPr/>
+          <a:lstStyle/>
+          <a:p>
+            <a:fld id="{330EA680-D336-4FF7-8B7A-9848BB0A1C32}" type="slidenum">
+              <a:rPr lang="en-GB" smtClean="0"/>
+              <a:t>‹#›</a:t>
+            </a:fld>
+            <a:endParaRPr lang="en-GB"/>
+          </a:p>
+        </p:txBody>
+      </p:sp>
     </p:spTree>
   </p:cSld>
 </p:sld>
@@ -4001,6 +4472,51 @@
               <a:rPr/>
               <a:t>Các sáng kiến</a:t>
             </a:r>
+          </a:p>
+        </p:txBody>
+      </p:sp>
+      <p:sp>
+        <p:nvSpPr>
+          <p:cNvPr id="5" name="Footer Placeholder 4"/>
+          <p:cNvSpPr>
+            <a:spLocks noGrp="1"/>
+          </p:cNvSpPr>
+          <p:nvPr>
+            <p:ph idx="11" sz="quarter" type="ftr"/>
+          </p:nvPr>
+        </p:nvSpPr>
+        <p:spPr/>
+        <p:txBody>
+          <a:bodyPr/>
+          <a:lstStyle/>
+          <a:p>
+            <a:r>
+              <a:rPr lang="en-GB"/>
+              <a:t>Tâm Anh Oxford Partnership</a:t>
+            </a:r>
+          </a:p>
+        </p:txBody>
+      </p:sp>
+      <p:sp>
+        <p:nvSpPr>
+          <p:cNvPr id="6" name="Slide Number Placeholder 5"/>
+          <p:cNvSpPr>
+            <a:spLocks noGrp="1"/>
+          </p:cNvSpPr>
+          <p:nvPr>
+            <p:ph idx="12" sz="quarter" type="sldNum"/>
+          </p:nvPr>
+        </p:nvSpPr>
+        <p:spPr/>
+        <p:txBody>
+          <a:bodyPr/>
+          <a:lstStyle/>
+          <a:p>
+            <a:fld id="{330EA680-D336-4FF7-8B7A-9848BB0A1C32}" type="slidenum">
+              <a:rPr lang="en-GB" smtClean="0"/>
+              <a:t>‹#›</a:t>
+            </a:fld>
+            <a:endParaRPr lang="en-GB"/>
           </a:p>
         </p:txBody>
       </p:sp>
@@ -4042,8 +4558,8 @@
         </p:blipFill>
         <p:spPr bwMode="auto">
           <a:xfrm>
-            <a:off x="457200" y="1600200"/>
-            <a:ext cx="8229600" cy="2590800"/>
+            <a:off x="838200" y="2336800"/>
+            <a:ext cx="10515600" cy="3314700"/>
           </a:xfrm>
           <a:prstGeom prst="rect">
             <a:avLst/>
@@ -4056,6 +4572,51 @@
           </a:ln>
         </p:spPr>
       </p:pic>
+      <p:sp>
+        <p:nvSpPr>
+          <p:cNvPr id="5" name="Footer Placeholder 4"/>
+          <p:cNvSpPr>
+            <a:spLocks noGrp="1"/>
+          </p:cNvSpPr>
+          <p:nvPr>
+            <p:ph idx="11" sz="quarter" type="ftr"/>
+          </p:nvPr>
+        </p:nvSpPr>
+        <p:spPr/>
+        <p:txBody>
+          <a:bodyPr/>
+          <a:lstStyle/>
+          <a:p>
+            <a:r>
+              <a:rPr lang="en-GB"/>
+              <a:t>Tâm Anh Oxford Partnership</a:t>
+            </a:r>
+          </a:p>
+        </p:txBody>
+      </p:sp>
+      <p:sp>
+        <p:nvSpPr>
+          <p:cNvPr id="6" name="Slide Number Placeholder 5"/>
+          <p:cNvSpPr>
+            <a:spLocks noGrp="1"/>
+          </p:cNvSpPr>
+          <p:nvPr>
+            <p:ph idx="12" sz="quarter" type="sldNum"/>
+          </p:nvPr>
+        </p:nvSpPr>
+        <p:spPr/>
+        <p:txBody>
+          <a:bodyPr/>
+          <a:lstStyle/>
+          <a:p>
+            <a:fld id="{330EA680-D336-4FF7-8B7A-9848BB0A1C32}" type="slidenum">
+              <a:rPr lang="en-GB" smtClean="0"/>
+              <a:t>‹#›</a:t>
+            </a:fld>
+            <a:endParaRPr lang="en-GB"/>
+          </a:p>
+        </p:txBody>
+      </p:sp>
     </p:spTree>
   </p:cSld>
 </p:sld>
@@ -4140,6 +4701,51 @@
               <a:rPr/>
               <a:t>Sáng kiến này nhằm tạo ra một không gian hỗ trợ nơi cá nhân cảm thấy được trao quyền để đóng góp tích cực, thử nghiệm và xây dựng các giải pháp làm cho thế giới tốt đẹp hơn.</a:t>
             </a:r>
+          </a:p>
+        </p:txBody>
+      </p:sp>
+      <p:sp>
+        <p:nvSpPr>
+          <p:cNvPr id="5" name="Footer Placeholder 4"/>
+          <p:cNvSpPr>
+            <a:spLocks noGrp="1"/>
+          </p:cNvSpPr>
+          <p:nvPr>
+            <p:ph idx="11" sz="quarter" type="ftr"/>
+          </p:nvPr>
+        </p:nvSpPr>
+        <p:spPr/>
+        <p:txBody>
+          <a:bodyPr/>
+          <a:lstStyle/>
+          <a:p>
+            <a:r>
+              <a:rPr lang="en-GB"/>
+              <a:t>Tâm Anh Oxford Partnership</a:t>
+            </a:r>
+          </a:p>
+        </p:txBody>
+      </p:sp>
+      <p:sp>
+        <p:nvSpPr>
+          <p:cNvPr id="6" name="Slide Number Placeholder 5"/>
+          <p:cNvSpPr>
+            <a:spLocks noGrp="1"/>
+          </p:cNvSpPr>
+          <p:nvPr>
+            <p:ph idx="12" sz="quarter" type="sldNum"/>
+          </p:nvPr>
+        </p:nvSpPr>
+        <p:spPr/>
+        <p:txBody>
+          <a:bodyPr/>
+          <a:lstStyle/>
+          <a:p>
+            <a:fld id="{330EA680-D336-4FF7-8B7A-9848BB0A1C32}" type="slidenum">
+              <a:rPr lang="en-GB" smtClean="0"/>
+              <a:t>‹#›</a:t>
+            </a:fld>
+            <a:endParaRPr lang="en-GB"/>
           </a:p>
         </p:txBody>
       </p:sp>
@@ -4181,8 +4787,8 @@
         </p:blipFill>
         <p:spPr bwMode="auto">
           <a:xfrm>
-            <a:off x="457200" y="1346200"/>
-            <a:ext cx="8229600" cy="3086100"/>
+            <a:off x="838200" y="2019300"/>
+            <a:ext cx="10515600" cy="3937000"/>
           </a:xfrm>
           <a:prstGeom prst="rect">
             <a:avLst/>
@@ -4195,6 +4801,51 @@
           </a:ln>
         </p:spPr>
       </p:pic>
+      <p:sp>
+        <p:nvSpPr>
+          <p:cNvPr id="5" name="Footer Placeholder 4"/>
+          <p:cNvSpPr>
+            <a:spLocks noGrp="1"/>
+          </p:cNvSpPr>
+          <p:nvPr>
+            <p:ph idx="11" sz="quarter" type="ftr"/>
+          </p:nvPr>
+        </p:nvSpPr>
+        <p:spPr/>
+        <p:txBody>
+          <a:bodyPr/>
+          <a:lstStyle/>
+          <a:p>
+            <a:r>
+              <a:rPr lang="en-GB"/>
+              <a:t>Tâm Anh Oxford Partnership</a:t>
+            </a:r>
+          </a:p>
+        </p:txBody>
+      </p:sp>
+      <p:sp>
+        <p:nvSpPr>
+          <p:cNvPr id="6" name="Slide Number Placeholder 5"/>
+          <p:cNvSpPr>
+            <a:spLocks noGrp="1"/>
+          </p:cNvSpPr>
+          <p:nvPr>
+            <p:ph idx="12" sz="quarter" type="sldNum"/>
+          </p:nvPr>
+        </p:nvSpPr>
+        <p:spPr/>
+        <p:txBody>
+          <a:bodyPr/>
+          <a:lstStyle/>
+          <a:p>
+            <a:fld id="{330EA680-D336-4FF7-8B7A-9848BB0A1C32}" type="slidenum">
+              <a:rPr lang="en-GB" smtClean="0"/>
+              <a:t>‹#›</a:t>
+            </a:fld>
+            <a:endParaRPr lang="en-GB"/>
+          </a:p>
+        </p:txBody>
+      </p:sp>
     </p:spTree>
   </p:cSld>
 </p:sld>
@@ -4258,6 +4909,51 @@
           </a:p>
         </p:txBody>
       </p:sp>
+      <p:sp>
+        <p:nvSpPr>
+          <p:cNvPr id="5" name="Footer Placeholder 4"/>
+          <p:cNvSpPr>
+            <a:spLocks noGrp="1"/>
+          </p:cNvSpPr>
+          <p:nvPr>
+            <p:ph idx="11" sz="quarter" type="ftr"/>
+          </p:nvPr>
+        </p:nvSpPr>
+        <p:spPr/>
+        <p:txBody>
+          <a:bodyPr/>
+          <a:lstStyle/>
+          <a:p>
+            <a:r>
+              <a:rPr lang="en-GB"/>
+              <a:t>Tâm Anh Oxford Partnership</a:t>
+            </a:r>
+          </a:p>
+        </p:txBody>
+      </p:sp>
+      <p:sp>
+        <p:nvSpPr>
+          <p:cNvPr id="6" name="Slide Number Placeholder 5"/>
+          <p:cNvSpPr>
+            <a:spLocks noGrp="1"/>
+          </p:cNvSpPr>
+          <p:nvPr>
+            <p:ph idx="12" sz="quarter" type="sldNum"/>
+          </p:nvPr>
+        </p:nvSpPr>
+        <p:spPr/>
+        <p:txBody>
+          <a:bodyPr/>
+          <a:lstStyle/>
+          <a:p>
+            <a:fld id="{330EA680-D336-4FF7-8B7A-9848BB0A1C32}" type="slidenum">
+              <a:rPr lang="en-GB" smtClean="0"/>
+              <a:t>‹#›</a:t>
+            </a:fld>
+            <a:endParaRPr lang="en-GB"/>
+          </a:p>
+        </p:txBody>
+      </p:sp>
     </p:spTree>
   </p:cSld>
 </p:sld>
@@ -4305,6 +5001,51 @@
           </a:p>
         </p:txBody>
       </p:sp>
+      <p:sp>
+        <p:nvSpPr>
+          <p:cNvPr id="5" name="Footer Placeholder 4"/>
+          <p:cNvSpPr>
+            <a:spLocks noGrp="1"/>
+          </p:cNvSpPr>
+          <p:nvPr>
+            <p:ph idx="11" sz="quarter" type="ftr"/>
+          </p:nvPr>
+        </p:nvSpPr>
+        <p:spPr/>
+        <p:txBody>
+          <a:bodyPr/>
+          <a:lstStyle/>
+          <a:p>
+            <a:r>
+              <a:rPr lang="en-GB"/>
+              <a:t>Tâm Anh Oxford Partnership</a:t>
+            </a:r>
+          </a:p>
+        </p:txBody>
+      </p:sp>
+      <p:sp>
+        <p:nvSpPr>
+          <p:cNvPr id="6" name="Slide Number Placeholder 5"/>
+          <p:cNvSpPr>
+            <a:spLocks noGrp="1"/>
+          </p:cNvSpPr>
+          <p:nvPr>
+            <p:ph idx="12" sz="quarter" type="sldNum"/>
+          </p:nvPr>
+        </p:nvSpPr>
+        <p:spPr/>
+        <p:txBody>
+          <a:bodyPr/>
+          <a:lstStyle/>
+          <a:p>
+            <a:fld id="{330EA680-D336-4FF7-8B7A-9848BB0A1C32}" type="slidenum">
+              <a:rPr lang="en-GB" smtClean="0"/>
+              <a:t>‹#›</a:t>
+            </a:fld>
+            <a:endParaRPr lang="en-GB"/>
+          </a:p>
+        </p:txBody>
+      </p:sp>
     </p:spTree>
   </p:cSld>
 </p:sld>
@@ -4339,8 +5080,8 @@
         </p:nvSpPr>
         <p:spPr>
           <a:xfrm>
-            <a:off x="457201" y="204787"/>
-            <a:ext cx="3008313" cy="871538"/>
+            <a:off x="839788" y="457200"/>
+            <a:ext cx="3932237" cy="1600200"/>
           </a:xfrm>
         </p:spPr>
         <p:txBody>
@@ -4407,8 +5148,8 @@
         </p:blipFill>
         <p:spPr bwMode="auto">
           <a:xfrm>
-            <a:off x="3568700" y="1409700"/>
-            <a:ext cx="5105400" cy="1981200"/>
+            <a:off x="5181600" y="2209800"/>
+            <a:ext cx="6172200" cy="2387600"/>
           </a:xfrm>
           <a:prstGeom prst="rect">
             <a:avLst/>
@@ -4421,6 +5162,51 @@
           </a:ln>
         </p:spPr>
       </p:pic>
+      <p:sp>
+        <p:nvSpPr>
+          <p:cNvPr id="6" name="Footer Placeholder 5"/>
+          <p:cNvSpPr>
+            <a:spLocks noGrp="1"/>
+          </p:cNvSpPr>
+          <p:nvPr>
+            <p:ph idx="11" sz="quarter" type="ftr"/>
+          </p:nvPr>
+        </p:nvSpPr>
+        <p:spPr/>
+        <p:txBody>
+          <a:bodyPr/>
+          <a:lstStyle/>
+          <a:p>
+            <a:r>
+              <a:rPr lang="en-GB"/>
+              <a:t>Tâm Anh Oxford Partnership</a:t>
+            </a:r>
+          </a:p>
+        </p:txBody>
+      </p:sp>
+      <p:sp>
+        <p:nvSpPr>
+          <p:cNvPr id="7" name="Slide Number Placeholder 6"/>
+          <p:cNvSpPr>
+            <a:spLocks noGrp="1"/>
+          </p:cNvSpPr>
+          <p:nvPr>
+            <p:ph idx="12" sz="quarter" type="sldNum"/>
+          </p:nvPr>
+        </p:nvSpPr>
+        <p:spPr/>
+        <p:txBody>
+          <a:bodyPr/>
+          <a:lstStyle/>
+          <a:p>
+            <a:fld id="{330EA680-D336-4FF7-8B7A-9848BB0A1C32}" type="slidenum">
+              <a:rPr lang="en-GB" smtClean="0"/>
+              <a:t>‹#›</a:t>
+            </a:fld>
+            <a:endParaRPr lang="en-GB"/>
+          </a:p>
+        </p:txBody>
+      </p:sp>
     </p:spTree>
   </p:cSld>
 </p:sld>
@@ -4484,8 +5270,8 @@
         </p:blipFill>
         <p:spPr bwMode="auto">
           <a:xfrm>
-            <a:off x="2552700" y="1193800"/>
-            <a:ext cx="4038600" cy="3390900"/>
+            <a:off x="3505200" y="1816100"/>
+            <a:ext cx="5181600" cy="4343400"/>
           </a:xfrm>
           <a:prstGeom prst="rect">
             <a:avLst/>
@@ -4498,6 +5284,51 @@
           </a:ln>
         </p:spPr>
       </p:pic>
+      <p:sp>
+        <p:nvSpPr>
+          <p:cNvPr id="5" name="Footer Placeholder 4"/>
+          <p:cNvSpPr>
+            <a:spLocks noGrp="1"/>
+          </p:cNvSpPr>
+          <p:nvPr>
+            <p:ph idx="11" sz="quarter" type="ftr"/>
+          </p:nvPr>
+        </p:nvSpPr>
+        <p:spPr/>
+        <p:txBody>
+          <a:bodyPr/>
+          <a:lstStyle/>
+          <a:p>
+            <a:r>
+              <a:rPr lang="en-GB"/>
+              <a:t>Tâm Anh Oxford Partnership</a:t>
+            </a:r>
+          </a:p>
+        </p:txBody>
+      </p:sp>
+      <p:sp>
+        <p:nvSpPr>
+          <p:cNvPr id="6" name="Slide Number Placeholder 5"/>
+          <p:cNvSpPr>
+            <a:spLocks noGrp="1"/>
+          </p:cNvSpPr>
+          <p:nvPr>
+            <p:ph idx="12" sz="quarter" type="sldNum"/>
+          </p:nvPr>
+        </p:nvSpPr>
+        <p:spPr/>
+        <p:txBody>
+          <a:bodyPr/>
+          <a:lstStyle/>
+          <a:p>
+            <a:fld id="{330EA680-D336-4FF7-8B7A-9848BB0A1C32}" type="slidenum">
+              <a:rPr lang="en-GB" smtClean="0"/>
+              <a:t>‹#›</a:t>
+            </a:fld>
+            <a:endParaRPr lang="en-GB"/>
+          </a:p>
+        </p:txBody>
+      </p:sp>
     </p:spTree>
   </p:cSld>
 </p:sld>
@@ -4561,8 +5392,8 @@
         </p:blipFill>
         <p:spPr bwMode="auto">
           <a:xfrm>
-            <a:off x="2057400" y="1193800"/>
-            <a:ext cx="5041900" cy="3390900"/>
+            <a:off x="2870200" y="1816100"/>
+            <a:ext cx="6451600" cy="4343400"/>
           </a:xfrm>
           <a:prstGeom prst="rect">
             <a:avLst/>
@@ -4575,6 +5406,51 @@
           </a:ln>
         </p:spPr>
       </p:pic>
+      <p:sp>
+        <p:nvSpPr>
+          <p:cNvPr id="5" name="Footer Placeholder 4"/>
+          <p:cNvSpPr>
+            <a:spLocks noGrp="1"/>
+          </p:cNvSpPr>
+          <p:nvPr>
+            <p:ph idx="11" sz="quarter" type="ftr"/>
+          </p:nvPr>
+        </p:nvSpPr>
+        <p:spPr/>
+        <p:txBody>
+          <a:bodyPr/>
+          <a:lstStyle/>
+          <a:p>
+            <a:r>
+              <a:rPr lang="en-GB"/>
+              <a:t>Tâm Anh Oxford Partnership</a:t>
+            </a:r>
+          </a:p>
+        </p:txBody>
+      </p:sp>
+      <p:sp>
+        <p:nvSpPr>
+          <p:cNvPr id="6" name="Slide Number Placeholder 5"/>
+          <p:cNvSpPr>
+            <a:spLocks noGrp="1"/>
+          </p:cNvSpPr>
+          <p:nvPr>
+            <p:ph idx="12" sz="quarter" type="sldNum"/>
+          </p:nvPr>
+        </p:nvSpPr>
+        <p:spPr/>
+        <p:txBody>
+          <a:bodyPr/>
+          <a:lstStyle/>
+          <a:p>
+            <a:fld id="{330EA680-D336-4FF7-8B7A-9848BB0A1C32}" type="slidenum">
+              <a:rPr lang="en-GB" smtClean="0"/>
+              <a:t>‹#›</a:t>
+            </a:fld>
+            <a:endParaRPr lang="en-GB"/>
+          </a:p>
+        </p:txBody>
+      </p:sp>
     </p:spTree>
   </p:cSld>
 </p:sld>
@@ -4622,6 +5498,51 @@
           </a:p>
         </p:txBody>
       </p:sp>
+      <p:sp>
+        <p:nvSpPr>
+          <p:cNvPr id="5" name="Footer Placeholder 4"/>
+          <p:cNvSpPr>
+            <a:spLocks noGrp="1"/>
+          </p:cNvSpPr>
+          <p:nvPr>
+            <p:ph idx="11" sz="quarter" type="ftr"/>
+          </p:nvPr>
+        </p:nvSpPr>
+        <p:spPr/>
+        <p:txBody>
+          <a:bodyPr/>
+          <a:lstStyle/>
+          <a:p>
+            <a:r>
+              <a:rPr lang="en-GB"/>
+              <a:t>Tâm Anh Oxford Partnership</a:t>
+            </a:r>
+          </a:p>
+        </p:txBody>
+      </p:sp>
+      <p:sp>
+        <p:nvSpPr>
+          <p:cNvPr id="6" name="Slide Number Placeholder 5"/>
+          <p:cNvSpPr>
+            <a:spLocks noGrp="1"/>
+          </p:cNvSpPr>
+          <p:nvPr>
+            <p:ph idx="12" sz="quarter" type="sldNum"/>
+          </p:nvPr>
+        </p:nvSpPr>
+        <p:spPr/>
+        <p:txBody>
+          <a:bodyPr/>
+          <a:lstStyle/>
+          <a:p>
+            <a:fld id="{330EA680-D336-4FF7-8B7A-9848BB0A1C32}" type="slidenum">
+              <a:rPr lang="en-GB" smtClean="0"/>
+              <a:t>‹#›</a:t>
+            </a:fld>
+            <a:endParaRPr lang="en-GB"/>
+          </a:p>
+        </p:txBody>
+      </p:sp>
     </p:spTree>
   </p:cSld>
 </p:sld>
@@ -4685,8 +5606,8 @@
         </p:blipFill>
         <p:spPr bwMode="auto">
           <a:xfrm>
-            <a:off x="2540000" y="1193800"/>
-            <a:ext cx="4051300" cy="3390900"/>
+            <a:off x="3505200" y="1816100"/>
+            <a:ext cx="5194300" cy="4343400"/>
           </a:xfrm>
           <a:prstGeom prst="rect">
             <a:avLst/>
@@ -4699,6 +5620,51 @@
           </a:ln>
         </p:spPr>
       </p:pic>
+      <p:sp>
+        <p:nvSpPr>
+          <p:cNvPr id="5" name="Footer Placeholder 4"/>
+          <p:cNvSpPr>
+            <a:spLocks noGrp="1"/>
+          </p:cNvSpPr>
+          <p:nvPr>
+            <p:ph idx="11" sz="quarter" type="ftr"/>
+          </p:nvPr>
+        </p:nvSpPr>
+        <p:spPr/>
+        <p:txBody>
+          <a:bodyPr/>
+          <a:lstStyle/>
+          <a:p>
+            <a:r>
+              <a:rPr lang="en-GB"/>
+              <a:t>Tâm Anh Oxford Partnership</a:t>
+            </a:r>
+          </a:p>
+        </p:txBody>
+      </p:sp>
+      <p:sp>
+        <p:nvSpPr>
+          <p:cNvPr id="6" name="Slide Number Placeholder 5"/>
+          <p:cNvSpPr>
+            <a:spLocks noGrp="1"/>
+          </p:cNvSpPr>
+          <p:nvPr>
+            <p:ph idx="12" sz="quarter" type="sldNum"/>
+          </p:nvPr>
+        </p:nvSpPr>
+        <p:spPr/>
+        <p:txBody>
+          <a:bodyPr/>
+          <a:lstStyle/>
+          <a:p>
+            <a:fld id="{330EA680-D336-4FF7-8B7A-9848BB0A1C32}" type="slidenum">
+              <a:rPr lang="en-GB" smtClean="0"/>
+              <a:t>‹#›</a:t>
+            </a:fld>
+            <a:endParaRPr lang="en-GB"/>
+          </a:p>
+        </p:txBody>
+      </p:sp>
     </p:spTree>
   </p:cSld>
 </p:sld>
@@ -4771,6 +5737,51 @@
           </a:p>
         </p:txBody>
       </p:sp>
+      <p:sp>
+        <p:nvSpPr>
+          <p:cNvPr id="5" name="Footer Placeholder 4"/>
+          <p:cNvSpPr>
+            <a:spLocks noGrp="1"/>
+          </p:cNvSpPr>
+          <p:nvPr>
+            <p:ph idx="11" sz="quarter" type="ftr"/>
+          </p:nvPr>
+        </p:nvSpPr>
+        <p:spPr/>
+        <p:txBody>
+          <a:bodyPr/>
+          <a:lstStyle/>
+          <a:p>
+            <a:r>
+              <a:rPr lang="en-GB"/>
+              <a:t>Tâm Anh Oxford Partnership</a:t>
+            </a:r>
+          </a:p>
+        </p:txBody>
+      </p:sp>
+      <p:sp>
+        <p:nvSpPr>
+          <p:cNvPr id="6" name="Slide Number Placeholder 5"/>
+          <p:cNvSpPr>
+            <a:spLocks noGrp="1"/>
+          </p:cNvSpPr>
+          <p:nvPr>
+            <p:ph idx="12" sz="quarter" type="sldNum"/>
+          </p:nvPr>
+        </p:nvSpPr>
+        <p:spPr/>
+        <p:txBody>
+          <a:bodyPr/>
+          <a:lstStyle/>
+          <a:p>
+            <a:fld id="{330EA680-D336-4FF7-8B7A-9848BB0A1C32}" type="slidenum">
+              <a:rPr lang="en-GB" smtClean="0"/>
+              <a:t>‹#›</a:t>
+            </a:fld>
+            <a:endParaRPr lang="en-GB"/>
+          </a:p>
+        </p:txBody>
+      </p:sp>
     </p:spTree>
   </p:cSld>
 </p:sld>
@@ -4871,8 +5882,8 @@
         </p:blipFill>
         <p:spPr bwMode="auto">
           <a:xfrm>
-            <a:off x="4648200" y="1752600"/>
-            <a:ext cx="4038600" cy="2260600"/>
+            <a:off x="6172200" y="2540000"/>
+            <a:ext cx="5181600" cy="2908300"/>
           </a:xfrm>
           <a:prstGeom prst="rect">
             <a:avLst/>
@@ -4885,6 +5896,51 @@
           </a:ln>
         </p:spPr>
       </p:pic>
+      <p:sp>
+        <p:nvSpPr>
+          <p:cNvPr id="6" name="Footer Placeholder 5"/>
+          <p:cNvSpPr>
+            <a:spLocks noGrp="1"/>
+          </p:cNvSpPr>
+          <p:nvPr>
+            <p:ph idx="11" sz="quarter" type="ftr"/>
+          </p:nvPr>
+        </p:nvSpPr>
+        <p:spPr/>
+        <p:txBody>
+          <a:bodyPr/>
+          <a:lstStyle/>
+          <a:p>
+            <a:r>
+              <a:rPr lang="en-GB"/>
+              <a:t>Tâm Anh Oxford Partnership</a:t>
+            </a:r>
+          </a:p>
+        </p:txBody>
+      </p:sp>
+      <p:sp>
+        <p:nvSpPr>
+          <p:cNvPr id="7" name="Slide Number Placeholder 6"/>
+          <p:cNvSpPr>
+            <a:spLocks noGrp="1"/>
+          </p:cNvSpPr>
+          <p:nvPr>
+            <p:ph idx="12" sz="quarter" type="sldNum"/>
+          </p:nvPr>
+        </p:nvSpPr>
+        <p:spPr/>
+        <p:txBody>
+          <a:bodyPr/>
+          <a:lstStyle/>
+          <a:p>
+            <a:fld id="{330EA680-D336-4FF7-8B7A-9848BB0A1C32}" type="slidenum">
+              <a:rPr lang="en-GB" smtClean="0"/>
+              <a:t>‹#›</a:t>
+            </a:fld>
+            <a:endParaRPr lang="en-GB"/>
+          </a:p>
+        </p:txBody>
+      </p:sp>
     </p:spTree>
   </p:cSld>
 </p:sld>
@@ -4919,8 +5975,8 @@
         </p:nvSpPr>
         <p:spPr>
           <a:xfrm>
-            <a:off x="457201" y="204787"/>
-            <a:ext cx="3008313" cy="871538"/>
+            <a:off x="839788" y="457200"/>
+            <a:ext cx="3932237" cy="1600200"/>
           </a:xfrm>
         </p:spPr>
         <p:txBody>
@@ -4994,8 +6050,8 @@
         </p:blipFill>
         <p:spPr bwMode="auto">
           <a:xfrm>
-            <a:off x="3568700" y="1409700"/>
-            <a:ext cx="5105400" cy="1955800"/>
+            <a:off x="5181600" y="2222500"/>
+            <a:ext cx="6172200" cy="2362200"/>
           </a:xfrm>
           <a:prstGeom prst="rect">
             <a:avLst/>
@@ -5008,6 +6064,51 @@
           </a:ln>
         </p:spPr>
       </p:pic>
+      <p:sp>
+        <p:nvSpPr>
+          <p:cNvPr id="6" name="Footer Placeholder 5"/>
+          <p:cNvSpPr>
+            <a:spLocks noGrp="1"/>
+          </p:cNvSpPr>
+          <p:nvPr>
+            <p:ph idx="11" sz="quarter" type="ftr"/>
+          </p:nvPr>
+        </p:nvSpPr>
+        <p:spPr/>
+        <p:txBody>
+          <a:bodyPr/>
+          <a:lstStyle/>
+          <a:p>
+            <a:r>
+              <a:rPr lang="en-GB"/>
+              <a:t>Tâm Anh Oxford Partnership</a:t>
+            </a:r>
+          </a:p>
+        </p:txBody>
+      </p:sp>
+      <p:sp>
+        <p:nvSpPr>
+          <p:cNvPr id="7" name="Slide Number Placeholder 6"/>
+          <p:cNvSpPr>
+            <a:spLocks noGrp="1"/>
+          </p:cNvSpPr>
+          <p:nvPr>
+            <p:ph idx="12" sz="quarter" type="sldNum"/>
+          </p:nvPr>
+        </p:nvSpPr>
+        <p:spPr/>
+        <p:txBody>
+          <a:bodyPr/>
+          <a:lstStyle/>
+          <a:p>
+            <a:fld id="{330EA680-D336-4FF7-8B7A-9848BB0A1C32}" type="slidenum">
+              <a:rPr lang="en-GB" smtClean="0"/>
+              <a:t>‹#›</a:t>
+            </a:fld>
+            <a:endParaRPr lang="en-GB"/>
+          </a:p>
+        </p:txBody>
+      </p:sp>
     </p:spTree>
   </p:cSld>
 </p:sld>
@@ -5134,6 +6235,51 @@
           </a:p>
         </p:txBody>
       </p:sp>
+      <p:sp>
+        <p:nvSpPr>
+          <p:cNvPr id="5" name="Footer Placeholder 4"/>
+          <p:cNvSpPr>
+            <a:spLocks noGrp="1"/>
+          </p:cNvSpPr>
+          <p:nvPr>
+            <p:ph idx="11" sz="quarter" type="ftr"/>
+          </p:nvPr>
+        </p:nvSpPr>
+        <p:spPr/>
+        <p:txBody>
+          <a:bodyPr/>
+          <a:lstStyle/>
+          <a:p>
+            <a:r>
+              <a:rPr lang="en-GB"/>
+              <a:t>Tâm Anh Oxford Partnership</a:t>
+            </a:r>
+          </a:p>
+        </p:txBody>
+      </p:sp>
+      <p:sp>
+        <p:nvSpPr>
+          <p:cNvPr id="6" name="Slide Number Placeholder 5"/>
+          <p:cNvSpPr>
+            <a:spLocks noGrp="1"/>
+          </p:cNvSpPr>
+          <p:nvPr>
+            <p:ph idx="12" sz="quarter" type="sldNum"/>
+          </p:nvPr>
+        </p:nvSpPr>
+        <p:spPr/>
+        <p:txBody>
+          <a:bodyPr/>
+          <a:lstStyle/>
+          <a:p>
+            <a:fld id="{330EA680-D336-4FF7-8B7A-9848BB0A1C32}" type="slidenum">
+              <a:rPr lang="en-GB" smtClean="0"/>
+              <a:t>‹#›</a:t>
+            </a:fld>
+            <a:endParaRPr lang="en-GB"/>
+          </a:p>
+        </p:txBody>
+      </p:sp>
     </p:spTree>
   </p:cSld>
 </p:sld>
@@ -5181,6 +6327,51 @@
           </a:p>
         </p:txBody>
       </p:sp>
+      <p:sp>
+        <p:nvSpPr>
+          <p:cNvPr id="5" name="Footer Placeholder 4"/>
+          <p:cNvSpPr>
+            <a:spLocks noGrp="1"/>
+          </p:cNvSpPr>
+          <p:nvPr>
+            <p:ph idx="11" sz="quarter" type="ftr"/>
+          </p:nvPr>
+        </p:nvSpPr>
+        <p:spPr/>
+        <p:txBody>
+          <a:bodyPr/>
+          <a:lstStyle/>
+          <a:p>
+            <a:r>
+              <a:rPr lang="en-GB"/>
+              <a:t>Tâm Anh Oxford Partnership</a:t>
+            </a:r>
+          </a:p>
+        </p:txBody>
+      </p:sp>
+      <p:sp>
+        <p:nvSpPr>
+          <p:cNvPr id="6" name="Slide Number Placeholder 5"/>
+          <p:cNvSpPr>
+            <a:spLocks noGrp="1"/>
+          </p:cNvSpPr>
+          <p:nvPr>
+            <p:ph idx="12" sz="quarter" type="sldNum"/>
+          </p:nvPr>
+        </p:nvSpPr>
+        <p:spPr/>
+        <p:txBody>
+          <a:bodyPr/>
+          <a:lstStyle/>
+          <a:p>
+            <a:fld id="{330EA680-D336-4FF7-8B7A-9848BB0A1C32}" type="slidenum">
+              <a:rPr lang="en-GB" smtClean="0"/>
+              <a:t>‹#›</a:t>
+            </a:fld>
+            <a:endParaRPr lang="en-GB"/>
+          </a:p>
+        </p:txBody>
+      </p:sp>
     </p:spTree>
   </p:cSld>
 </p:sld>
@@ -5228,6 +6419,51 @@
           </a:p>
         </p:txBody>
       </p:sp>
+      <p:sp>
+        <p:nvSpPr>
+          <p:cNvPr id="5" name="Footer Placeholder 4"/>
+          <p:cNvSpPr>
+            <a:spLocks noGrp="1"/>
+          </p:cNvSpPr>
+          <p:nvPr>
+            <p:ph idx="11" sz="quarter" type="ftr"/>
+          </p:nvPr>
+        </p:nvSpPr>
+        <p:spPr/>
+        <p:txBody>
+          <a:bodyPr/>
+          <a:lstStyle/>
+          <a:p>
+            <a:r>
+              <a:rPr lang="en-GB"/>
+              <a:t>Tâm Anh Oxford Partnership</a:t>
+            </a:r>
+          </a:p>
+        </p:txBody>
+      </p:sp>
+      <p:sp>
+        <p:nvSpPr>
+          <p:cNvPr id="6" name="Slide Number Placeholder 5"/>
+          <p:cNvSpPr>
+            <a:spLocks noGrp="1"/>
+          </p:cNvSpPr>
+          <p:nvPr>
+            <p:ph idx="12" sz="quarter" type="sldNum"/>
+          </p:nvPr>
+        </p:nvSpPr>
+        <p:spPr/>
+        <p:txBody>
+          <a:bodyPr/>
+          <a:lstStyle/>
+          <a:p>
+            <a:fld id="{330EA680-D336-4FF7-8B7A-9848BB0A1C32}" type="slidenum">
+              <a:rPr lang="en-GB" smtClean="0"/>
+              <a:t>‹#›</a:t>
+            </a:fld>
+            <a:endParaRPr lang="en-GB"/>
+          </a:p>
+        </p:txBody>
+      </p:sp>
     </p:spTree>
   </p:cSld>
 </p:sld>
@@ -5275,6 +6511,51 @@
           </a:p>
         </p:txBody>
       </p:sp>
+      <p:sp>
+        <p:nvSpPr>
+          <p:cNvPr id="5" name="Footer Placeholder 4"/>
+          <p:cNvSpPr>
+            <a:spLocks noGrp="1"/>
+          </p:cNvSpPr>
+          <p:nvPr>
+            <p:ph idx="11" sz="quarter" type="ftr"/>
+          </p:nvPr>
+        </p:nvSpPr>
+        <p:spPr/>
+        <p:txBody>
+          <a:bodyPr/>
+          <a:lstStyle/>
+          <a:p>
+            <a:r>
+              <a:rPr lang="en-GB"/>
+              <a:t>Tâm Anh Oxford Partnership</a:t>
+            </a:r>
+          </a:p>
+        </p:txBody>
+      </p:sp>
+      <p:sp>
+        <p:nvSpPr>
+          <p:cNvPr id="6" name="Slide Number Placeholder 5"/>
+          <p:cNvSpPr>
+            <a:spLocks noGrp="1"/>
+          </p:cNvSpPr>
+          <p:nvPr>
+            <p:ph idx="12" sz="quarter" type="sldNum"/>
+          </p:nvPr>
+        </p:nvSpPr>
+        <p:spPr/>
+        <p:txBody>
+          <a:bodyPr/>
+          <a:lstStyle/>
+          <a:p>
+            <a:fld id="{330EA680-D336-4FF7-8B7A-9848BB0A1C32}" type="slidenum">
+              <a:rPr lang="en-GB" smtClean="0"/>
+              <a:t>‹#›</a:t>
+            </a:fld>
+            <a:endParaRPr lang="en-GB"/>
+          </a:p>
+        </p:txBody>
+      </p:sp>
     </p:spTree>
   </p:cSld>
 </p:sld>
@@ -5322,6 +6603,51 @@
           </a:p>
         </p:txBody>
       </p:sp>
+      <p:sp>
+        <p:nvSpPr>
+          <p:cNvPr id="5" name="Footer Placeholder 4"/>
+          <p:cNvSpPr>
+            <a:spLocks noGrp="1"/>
+          </p:cNvSpPr>
+          <p:nvPr>
+            <p:ph idx="11" sz="quarter" type="ftr"/>
+          </p:nvPr>
+        </p:nvSpPr>
+        <p:spPr/>
+        <p:txBody>
+          <a:bodyPr/>
+          <a:lstStyle/>
+          <a:p>
+            <a:r>
+              <a:rPr lang="en-GB"/>
+              <a:t>Tâm Anh Oxford Partnership</a:t>
+            </a:r>
+          </a:p>
+        </p:txBody>
+      </p:sp>
+      <p:sp>
+        <p:nvSpPr>
+          <p:cNvPr id="6" name="Slide Number Placeholder 5"/>
+          <p:cNvSpPr>
+            <a:spLocks noGrp="1"/>
+          </p:cNvSpPr>
+          <p:nvPr>
+            <p:ph idx="12" sz="quarter" type="sldNum"/>
+          </p:nvPr>
+        </p:nvSpPr>
+        <p:spPr/>
+        <p:txBody>
+          <a:bodyPr/>
+          <a:lstStyle/>
+          <a:p>
+            <a:fld id="{330EA680-D336-4FF7-8B7A-9848BB0A1C32}" type="slidenum">
+              <a:rPr lang="en-GB" smtClean="0"/>
+              <a:t>‹#›</a:t>
+            </a:fld>
+            <a:endParaRPr lang="en-GB"/>
+          </a:p>
+        </p:txBody>
+      </p:sp>
     </p:spTree>
   </p:cSld>
 </p:sld>
@@ -5445,13 +6771,58 @@
           </a:p>
         </p:txBody>
       </p:sp>
+      <p:sp>
+        <p:nvSpPr>
+          <p:cNvPr id="5" name="Footer Placeholder 4"/>
+          <p:cNvSpPr>
+            <a:spLocks noGrp="1"/>
+          </p:cNvSpPr>
+          <p:nvPr>
+            <p:ph idx="11" sz="quarter" type="ftr"/>
+          </p:nvPr>
+        </p:nvSpPr>
+        <p:spPr/>
+        <p:txBody>
+          <a:bodyPr/>
+          <a:lstStyle/>
+          <a:p>
+            <a:r>
+              <a:rPr lang="en-GB"/>
+              <a:t>Tâm Anh Oxford Partnership</a:t>
+            </a:r>
+          </a:p>
+        </p:txBody>
+      </p:sp>
+      <p:sp>
+        <p:nvSpPr>
+          <p:cNvPr id="6" name="Slide Number Placeholder 5"/>
+          <p:cNvSpPr>
+            <a:spLocks noGrp="1"/>
+          </p:cNvSpPr>
+          <p:nvPr>
+            <p:ph idx="12" sz="quarter" type="sldNum"/>
+          </p:nvPr>
+        </p:nvSpPr>
+        <p:spPr/>
+        <p:txBody>
+          <a:bodyPr/>
+          <a:lstStyle/>
+          <a:p>
+            <a:fld id="{330EA680-D336-4FF7-8B7A-9848BB0A1C32}" type="slidenum">
+              <a:rPr lang="en-GB" smtClean="0"/>
+              <a:t>‹#›</a:t>
+            </a:fld>
+            <a:endParaRPr lang="en-GB"/>
+          </a:p>
+        </p:txBody>
+      </p:sp>
     </p:spTree>
   </p:cSld>
 </p:sld>
 </file>
 
 <file path=ppt/theme/theme1.xml><?xml version="1.0" encoding="utf-8"?>
-<a:theme xmlns:a="http://schemas.openxmlformats.org/drawingml/2006/main" name="Office Theme">
+<a:theme xmlns:a="http://schemas.openxmlformats.org/drawingml/2006/main" name="office theme">
   <a:themeElements>
     <a:clrScheme name="Office">
       <a:dk1>
@@ -5461,39 +6832,39 @@
         <a:sysClr val="window" lastClr="FFFFFF"/>
       </a:lt1>
       <a:dk2>
-        <a:srgbClr val="1F497D"/>
+        <a:srgbClr val="0E2841"/>
       </a:dk2>
       <a:lt2>
-        <a:srgbClr val="EEECE1"/>
+        <a:srgbClr val="E8E8E8"/>
       </a:lt2>
       <a:accent1>
-        <a:srgbClr val="4F81BD"/>
+        <a:srgbClr val="156082"/>
       </a:accent1>
       <a:accent2>
-        <a:srgbClr val="C0504D"/>
+        <a:srgbClr val="E97132"/>
       </a:accent2>
       <a:accent3>
-        <a:srgbClr val="9BBB59"/>
+        <a:srgbClr val="196B24"/>
       </a:accent3>
       <a:accent4>
-        <a:srgbClr val="8064A2"/>
+        <a:srgbClr val="0F9ED5"/>
       </a:accent4>
       <a:accent5>
-        <a:srgbClr val="4BACC6"/>
+        <a:srgbClr val="A02B93"/>
       </a:accent5>
       <a:accent6>
-        <a:srgbClr val="F79646"/>
+        <a:srgbClr val="4EA72E"/>
       </a:accent6>
       <a:hlink>
-        <a:srgbClr val="0000FF"/>
+        <a:srgbClr val="467886"/>
       </a:hlink>
       <a:folHlink>
-        <a:srgbClr val="800080"/>
+        <a:srgbClr val="96607D"/>
       </a:folHlink>
     </a:clrScheme>
-    <a:fontScheme name="Office">
+    <a:fontScheme name="Office Theme">
       <a:majorFont>
-        <a:latin typeface="Calibri"/>
+        <a:latin typeface="Aptos Display" panose="020F0302020204030204"/>
         <a:ea typeface=""/>
         <a:cs typeface=""/>
         <a:font script="Jpan" typeface="ＭＳ Ｐゴシック"/>
@@ -5528,7 +6899,7 @@
         <a:font script="Geor" typeface="Sylfaen"/>
       </a:majorFont>
       <a:minorFont>
-        <a:latin typeface="Calibri"/>
+        <a:latin typeface="Aptos" panose="020B0004020202020204"/>
         <a:ea typeface=""/>
         <a:cs typeface=""/>
         <a:font script="Jpan" typeface="ＭＳ Ｐゴシック"/>
@@ -5563,7 +6934,7 @@
         <a:font script="Geor" typeface="Sylfaen"/>
       </a:minorFont>
     </a:fontScheme>
-    <a:fmtScheme name="Office">
+    <a:fmtScheme name="Office Theme">
       <a:fillStyleLst>
         <a:solidFill>
           <a:schemeClr val="phClr"/>
@@ -5572,180 +6943,136 @@
           <a:gsLst>
             <a:gs pos="0">
               <a:schemeClr val="phClr">
-                <a:tint val="50000"/>
-                <a:satMod val="300000"/>
+                <a:lumMod val="110000"/>
+                <a:satMod val="105000"/>
+                <a:tint val="67000"/>
               </a:schemeClr>
             </a:gs>
-            <a:gs pos="35000">
+            <a:gs pos="50000">
               <a:schemeClr val="phClr">
-                <a:tint val="37000"/>
-                <a:satMod val="300000"/>
+                <a:lumMod val="105000"/>
+                <a:satMod val="103000"/>
+                <a:tint val="73000"/>
               </a:schemeClr>
             </a:gs>
             <a:gs pos="100000">
               <a:schemeClr val="phClr">
-                <a:tint val="15000"/>
-                <a:satMod val="350000"/>
+                <a:lumMod val="105000"/>
+                <a:satMod val="109000"/>
+                <a:tint val="81000"/>
               </a:schemeClr>
             </a:gs>
           </a:gsLst>
-          <a:lin ang="16200000" scaled="1"/>
+          <a:lin ang="5400000" scaled="0"/>
         </a:gradFill>
         <a:gradFill rotWithShape="1">
           <a:gsLst>
             <a:gs pos="0">
               <a:schemeClr val="phClr">
-                <a:tint val="100000"/>
+                <a:satMod val="103000"/>
+                <a:lumMod val="102000"/>
+                <a:tint val="94000"/>
+              </a:schemeClr>
+            </a:gs>
+            <a:gs pos="50000">
+              <a:schemeClr val="phClr">
+                <a:satMod val="110000"/>
+                <a:lumMod val="100000"/>
                 <a:shade val="100000"/>
-                <a:satMod val="130000"/>
               </a:schemeClr>
             </a:gs>
             <a:gs pos="100000">
               <a:schemeClr val="phClr">
-                <a:tint val="50000"/>
-                <a:shade val="100000"/>
-                <a:satMod val="350000"/>
+                <a:lumMod val="99000"/>
+                <a:satMod val="120000"/>
+                <a:shade val="78000"/>
               </a:schemeClr>
             </a:gs>
           </a:gsLst>
-          <a:lin ang="16200000" scaled="0"/>
+          <a:lin ang="5400000" scaled="0"/>
         </a:gradFill>
       </a:fillStyleLst>
       <a:lnStyleLst>
-        <a:ln w="9525" cap="flat" cmpd="sng" algn="ctr">
+        <a:ln w="12700" cap="flat" cmpd="sng" algn="ctr">
           <a:solidFill>
-            <a:schemeClr val="phClr">
-              <a:shade val="95000"/>
-              <a:satMod val="105000"/>
-            </a:schemeClr>
+            <a:schemeClr val="phClr"/>
           </a:solidFill>
           <a:prstDash val="solid"/>
+          <a:miter lim="800000"/>
+        </a:ln>
+        <a:ln w="19050" cap="flat" cmpd="sng" algn="ctr">
+          <a:solidFill>
+            <a:schemeClr val="phClr"/>
+          </a:solidFill>
+          <a:prstDash val="solid"/>
+          <a:miter lim="800000"/>
         </a:ln>
         <a:ln w="25400" cap="flat" cmpd="sng" algn="ctr">
           <a:solidFill>
             <a:schemeClr val="phClr"/>
           </a:solidFill>
           <a:prstDash val="solid"/>
-        </a:ln>
-        <a:ln w="38100" cap="flat" cmpd="sng" algn="ctr">
-          <a:solidFill>
-            <a:schemeClr val="phClr"/>
-          </a:solidFill>
-          <a:prstDash val="solid"/>
+          <a:miter lim="800000"/>
         </a:ln>
       </a:lnStyleLst>
       <a:effectStyleLst>
         <a:effectStyle>
+          <a:effectLst/>
+        </a:effectStyle>
+        <a:effectStyle>
+          <a:effectLst/>
+        </a:effectStyle>
+        <a:effectStyle>
           <a:effectLst>
-            <a:outerShdw blurRad="40000" dist="20000" dir="5400000" rotWithShape="0">
+            <a:outerShdw blurRad="57150" dist="19050" dir="5400000" algn="ctr" rotWithShape="0">
               <a:srgbClr val="000000">
-                <a:alpha val="38000"/>
+                <a:alpha val="63000"/>
               </a:srgbClr>
             </a:outerShdw>
           </a:effectLst>
-        </a:effectStyle>
-        <a:effectStyle>
-          <a:effectLst>
-            <a:outerShdw blurRad="40000" dist="23000" dir="5400000" rotWithShape="0">
-              <a:srgbClr val="000000">
-                <a:alpha val="35000"/>
-              </a:srgbClr>
-            </a:outerShdw>
-          </a:effectLst>
-        </a:effectStyle>
-        <a:effectStyle>
-          <a:effectLst>
-            <a:outerShdw blurRad="40000" dist="23000" dir="5400000" rotWithShape="0">
-              <a:srgbClr val="000000">
-                <a:alpha val="35000"/>
-              </a:srgbClr>
-            </a:outerShdw>
-          </a:effectLst>
-          <a:scene3d>
-            <a:camera prst="orthographicFront">
-              <a:rot lat="0" lon="0" rev="0"/>
-            </a:camera>
-            <a:lightRig rig="threePt" dir="t">
-              <a:rot lat="0" lon="0" rev="1200000"/>
-            </a:lightRig>
-          </a:scene3d>
-          <a:sp3d>
-            <a:bevelT w="63500" h="25400"/>
-          </a:sp3d>
         </a:effectStyle>
       </a:effectStyleLst>
       <a:bgFillStyleLst>
         <a:solidFill>
           <a:schemeClr val="phClr"/>
         </a:solidFill>
+        <a:solidFill>
+          <a:schemeClr val="phClr">
+            <a:tint val="95000"/>
+            <a:satMod val="170000"/>
+          </a:schemeClr>
+        </a:solidFill>
         <a:gradFill rotWithShape="1">
           <a:gsLst>
             <a:gs pos="0">
               <a:schemeClr val="phClr">
-                <a:tint val="40000"/>
-                <a:satMod val="350000"/>
+                <a:tint val="93000"/>
+                <a:satMod val="150000"/>
+                <a:shade val="98000"/>
+                <a:lumMod val="102000"/>
               </a:schemeClr>
             </a:gs>
-            <a:gs pos="40000">
+            <a:gs pos="50000">
               <a:schemeClr val="phClr">
-                <a:tint val="45000"/>
-                <a:shade val="99000"/>
-                <a:satMod val="350000"/>
+                <a:tint val="98000"/>
+                <a:satMod val="130000"/>
+                <a:shade val="90000"/>
+                <a:lumMod val="103000"/>
               </a:schemeClr>
             </a:gs>
             <a:gs pos="100000">
               <a:schemeClr val="phClr">
-                <a:shade val="20000"/>
-                <a:satMod val="255000"/>
+                <a:shade val="63000"/>
+                <a:satMod val="120000"/>
               </a:schemeClr>
             </a:gs>
           </a:gsLst>
-          <a:path path="circle">
-            <a:fillToRect l="50000" t="-80000" r="50000" b="180000"/>
-          </a:path>
-        </a:gradFill>
-        <a:gradFill rotWithShape="1">
-          <a:gsLst>
-            <a:gs pos="0">
-              <a:schemeClr val="phClr">
-                <a:tint val="80000"/>
-                <a:satMod val="300000"/>
-              </a:schemeClr>
-            </a:gs>
-            <a:gs pos="100000">
-              <a:schemeClr val="phClr">
-                <a:shade val="30000"/>
-                <a:satMod val="200000"/>
-              </a:schemeClr>
-            </a:gs>
-          </a:gsLst>
-          <a:path path="circle">
-            <a:fillToRect l="50000" t="50000" r="50000" b="50000"/>
-          </a:path>
+          <a:lin ang="5400000" scaled="0"/>
         </a:gradFill>
       </a:bgFillStyleLst>
     </a:fmtScheme>
   </a:themeElements>
   <a:objectDefaults>
-    <a:spDef>
-      <a:spPr/>
-      <a:bodyPr/>
-      <a:lstStyle/>
-      <a:style>
-        <a:lnRef idx="1">
-          <a:schemeClr val="accent1"/>
-        </a:lnRef>
-        <a:fillRef idx="3">
-          <a:schemeClr val="accent1"/>
-        </a:fillRef>
-        <a:effectRef idx="2">
-          <a:schemeClr val="accent1"/>
-        </a:effectRef>
-        <a:fontRef idx="minor">
-          <a:schemeClr val="lt1"/>
-        </a:fontRef>
-      </a:style>
-    </a:spDef>
     <a:lnDef>
       <a:spPr/>
       <a:bodyPr/>
@@ -5767,6 +7094,11 @@
     </a:lnDef>
   </a:objectDefaults>
   <a:extraClrSchemeLst/>
+  <a:extLst>
+    <a:ext uri="{05A4C25C-085E-4340-85A3-A5531E510DB2}">
+      <thm15:themeFamily xmlns:thm15="http://schemas.microsoft.com/office/thememl/2012/main" name="Office Theme" id="{2E142A2C-CD16-42D6-873A-C26D2A0506FA}" vid="{1BDDFF52-6CD6-40A5-AB3C-68EB2F1E4D0A}"/>
+    </a:ext>
+  </a:extLst>
 </a:theme>
 </file>
 
